--- a/slides/03-3-Kruskals.pptx
+++ b/slides/03-3-Kruskals.pptx
@@ -220,7 +220,7 @@
           <a:p>
             <a:fld id="{C5B45307-6ED4-B142-BD64-10F739779302}" type="datetimeFigureOut">
               <a:rPr lang="en-US" smtClean="0"/>
-              <a:t>9/16/25</a:t>
+              <a:t>2/26/26</a:t>
             </a:fld>
             <a:endParaRPr lang="en-US"/>
           </a:p>
@@ -544,7 +544,7 @@
           <a:noFill/>
           <a:extLst>
             <a:ext uri="{909E8E84-426E-40dd-AFC4-6F175D3DCCD1}">
-              <a14:hiddenFill xmlns="" xmlns:a14="http://schemas.microsoft.com/office/drawing/2010/main">
+              <a14:hiddenFill xmlns:a14="http://schemas.microsoft.com/office/drawing/2010/main" xmlns="">
                 <a:solidFill>
                   <a:srgbClr val="FFFFFF"/>
                 </a:solidFill>
@@ -603,7 +603,7 @@
             </a:ln>
             <a:extLst>
               <a:ext uri="{91240B29-F687-4f45-9708-019B960494DF}">
-                <a14:hiddenLine xmlns="" xmlns:a14="http://schemas.microsoft.com/office/drawing/2010/main" w="9525">
+                <a14:hiddenLine xmlns:a14="http://schemas.microsoft.com/office/drawing/2010/main" xmlns="" w="9525">
                   <a:solidFill>
                     <a:srgbClr val="000000"/>
                   </a:solidFill>
@@ -693,7 +693,7 @@
             </a:ln>
             <a:extLst>
               <a:ext uri="{91240B29-F687-4f45-9708-019B960494DF}">
-                <a14:hiddenLine xmlns="" xmlns:a14="http://schemas.microsoft.com/office/drawing/2010/main" w="9525">
+                <a14:hiddenLine xmlns:a14="http://schemas.microsoft.com/office/drawing/2010/main" xmlns="" w="9525">
                   <a:solidFill>
                     <a:srgbClr val="000000"/>
                   </a:solidFill>
@@ -783,7 +783,7 @@
             </a:ln>
             <a:extLst>
               <a:ext uri="{91240B29-F687-4f45-9708-019B960494DF}">
-                <a14:hiddenLine xmlns="" xmlns:a14="http://schemas.microsoft.com/office/drawing/2010/main" w="9525">
+                <a14:hiddenLine xmlns:a14="http://schemas.microsoft.com/office/drawing/2010/main" xmlns="" w="9525">
                   <a:solidFill>
                     <a:srgbClr val="000000"/>
                   </a:solidFill>
@@ -817,7 +817,7 @@
             </a:ln>
             <a:extLst>
               <a:ext uri="{91240B29-F687-4f45-9708-019B960494DF}">
-                <a14:hiddenLine xmlns="" xmlns:a14="http://schemas.microsoft.com/office/drawing/2010/main" w="9525">
+                <a14:hiddenLine xmlns:a14="http://schemas.microsoft.com/office/drawing/2010/main" xmlns="" w="9525">
                   <a:solidFill>
                     <a:srgbClr val="000000"/>
                   </a:solidFill>
@@ -907,7 +907,7 @@
             </a:ln>
             <a:extLst>
               <a:ext uri="{91240B29-F687-4f45-9708-019B960494DF}">
-                <a14:hiddenLine xmlns="" xmlns:a14="http://schemas.microsoft.com/office/drawing/2010/main" w="9525">
+                <a14:hiddenLine xmlns:a14="http://schemas.microsoft.com/office/drawing/2010/main" xmlns="" w="9525">
                   <a:solidFill>
                     <a:srgbClr val="000000"/>
                   </a:solidFill>
@@ -969,7 +969,7 @@
             </a:ln>
             <a:extLst>
               <a:ext uri="{91240B29-F687-4f45-9708-019B960494DF}">
-                <a14:hiddenLine xmlns="" xmlns:a14="http://schemas.microsoft.com/office/drawing/2010/main" w="9525">
+                <a14:hiddenLine xmlns:a14="http://schemas.microsoft.com/office/drawing/2010/main" xmlns="" w="9525">
                   <a:solidFill>
                     <a:srgbClr val="000000"/>
                   </a:solidFill>
@@ -1031,7 +1031,7 @@
             </a:ln>
             <a:extLst>
               <a:ext uri="{91240B29-F687-4f45-9708-019B960494DF}">
-                <a14:hiddenLine xmlns="" xmlns:a14="http://schemas.microsoft.com/office/drawing/2010/main" w="9525">
+                <a14:hiddenLine xmlns:a14="http://schemas.microsoft.com/office/drawing/2010/main" xmlns="" w="9525">
                   <a:solidFill>
                     <a:srgbClr val="000000"/>
                   </a:solidFill>
@@ -1121,7 +1121,7 @@
             </a:ln>
             <a:extLst>
               <a:ext uri="{91240B29-F687-4f45-9708-019B960494DF}">
-                <a14:hiddenLine xmlns="" xmlns:a14="http://schemas.microsoft.com/office/drawing/2010/main" w="9525">
+                <a14:hiddenLine xmlns:a14="http://schemas.microsoft.com/office/drawing/2010/main" xmlns="" w="9525">
                   <a:solidFill>
                     <a:srgbClr val="000000"/>
                   </a:solidFill>
@@ -1183,7 +1183,7 @@
             </a:ln>
             <a:extLst>
               <a:ext uri="{91240B29-F687-4f45-9708-019B960494DF}">
-                <a14:hiddenLine xmlns="" xmlns:a14="http://schemas.microsoft.com/office/drawing/2010/main" w="9525">
+                <a14:hiddenLine xmlns:a14="http://schemas.microsoft.com/office/drawing/2010/main" xmlns="" w="9525">
                   <a:solidFill>
                     <a:srgbClr val="000000"/>
                   </a:solidFill>
@@ -1245,7 +1245,7 @@
             </a:ln>
             <a:extLst>
               <a:ext uri="{91240B29-F687-4f45-9708-019B960494DF}">
-                <a14:hiddenLine xmlns="" xmlns:a14="http://schemas.microsoft.com/office/drawing/2010/main" w="9525">
+                <a14:hiddenLine xmlns:a14="http://schemas.microsoft.com/office/drawing/2010/main" xmlns="" w="9525">
                   <a:solidFill>
                     <a:srgbClr val="000000"/>
                   </a:solidFill>
@@ -1335,7 +1335,7 @@
             </a:ln>
             <a:extLst>
               <a:ext uri="{91240B29-F687-4f45-9708-019B960494DF}">
-                <a14:hiddenLine xmlns="" xmlns:a14="http://schemas.microsoft.com/office/drawing/2010/main" w="9525">
+                <a14:hiddenLine xmlns:a14="http://schemas.microsoft.com/office/drawing/2010/main" xmlns="" w="9525">
                   <a:solidFill>
                     <a:srgbClr val="000000"/>
                   </a:solidFill>
@@ -1425,7 +1425,7 @@
             </a:ln>
             <a:extLst>
               <a:ext uri="{91240B29-F687-4f45-9708-019B960494DF}">
-                <a14:hiddenLine xmlns="" xmlns:a14="http://schemas.microsoft.com/office/drawing/2010/main" w="9525">
+                <a14:hiddenLine xmlns:a14="http://schemas.microsoft.com/office/drawing/2010/main" xmlns="" w="9525">
                   <a:solidFill>
                     <a:srgbClr val="000000"/>
                   </a:solidFill>
@@ -1487,7 +1487,7 @@
             </a:ln>
             <a:extLst>
               <a:ext uri="{91240B29-F687-4f45-9708-019B960494DF}">
-                <a14:hiddenLine xmlns="" xmlns:a14="http://schemas.microsoft.com/office/drawing/2010/main" w="9525">
+                <a14:hiddenLine xmlns:a14="http://schemas.microsoft.com/office/drawing/2010/main" xmlns="" w="9525">
                   <a:solidFill>
                     <a:srgbClr val="000000"/>
                   </a:solidFill>
@@ -1597,7 +1597,7 @@
             </a:ln>
             <a:extLst>
               <a:ext uri="{91240B29-F687-4f45-9708-019B960494DF}">
-                <a14:hiddenLine xmlns="" xmlns:a14="http://schemas.microsoft.com/office/drawing/2010/main" w="9525">
+                <a14:hiddenLine xmlns:a14="http://schemas.microsoft.com/office/drawing/2010/main" xmlns="" w="9525">
                   <a:solidFill>
                     <a:srgbClr val="000000"/>
                   </a:solidFill>
@@ -1659,7 +1659,7 @@
             </a:ln>
             <a:extLst>
               <a:ext uri="{91240B29-F687-4f45-9708-019B960494DF}">
-                <a14:hiddenLine xmlns="" xmlns:a14="http://schemas.microsoft.com/office/drawing/2010/main" w="9525">
+                <a14:hiddenLine xmlns:a14="http://schemas.microsoft.com/office/drawing/2010/main" xmlns="" w="9525">
                   <a:solidFill>
                     <a:srgbClr val="000000"/>
                   </a:solidFill>
@@ -1749,7 +1749,7 @@
             </a:ln>
             <a:extLst>
               <a:ext uri="{91240B29-F687-4f45-9708-019B960494DF}">
-                <a14:hiddenLine xmlns="" xmlns:a14="http://schemas.microsoft.com/office/drawing/2010/main" w="9525">
+                <a14:hiddenLine xmlns:a14="http://schemas.microsoft.com/office/drawing/2010/main" xmlns="" w="9525">
                   <a:solidFill>
                     <a:srgbClr val="000000"/>
                   </a:solidFill>
@@ -1839,7 +1839,7 @@
             </a:ln>
             <a:extLst>
               <a:ext uri="{91240B29-F687-4f45-9708-019B960494DF}">
-                <a14:hiddenLine xmlns="" xmlns:a14="http://schemas.microsoft.com/office/drawing/2010/main" w="9525">
+                <a14:hiddenLine xmlns:a14="http://schemas.microsoft.com/office/drawing/2010/main" xmlns="" w="9525">
                   <a:solidFill>
                     <a:srgbClr val="000000"/>
                   </a:solidFill>
@@ -1901,7 +1901,7 @@
             </a:ln>
             <a:extLst>
               <a:ext uri="{91240B29-F687-4f45-9708-019B960494DF}">
-                <a14:hiddenLine xmlns="" xmlns:a14="http://schemas.microsoft.com/office/drawing/2010/main" w="9525">
+                <a14:hiddenLine xmlns:a14="http://schemas.microsoft.com/office/drawing/2010/main" xmlns="" w="9525">
                   <a:solidFill>
                     <a:srgbClr val="000000"/>
                   </a:solidFill>
@@ -1991,7 +1991,7 @@
             </a:ln>
             <a:extLst>
               <a:ext uri="{91240B29-F687-4f45-9708-019B960494DF}">
-                <a14:hiddenLine xmlns="" xmlns:a14="http://schemas.microsoft.com/office/drawing/2010/main" w="9525">
+                <a14:hiddenLine xmlns:a14="http://schemas.microsoft.com/office/drawing/2010/main" xmlns="" w="9525">
                   <a:solidFill>
                     <a:srgbClr val="000000"/>
                   </a:solidFill>
@@ -2081,7 +2081,7 @@
             </a:ln>
             <a:extLst>
               <a:ext uri="{91240B29-F687-4f45-9708-019B960494DF}">
-                <a14:hiddenLine xmlns="" xmlns:a14="http://schemas.microsoft.com/office/drawing/2010/main" w="9525">
+                <a14:hiddenLine xmlns:a14="http://schemas.microsoft.com/office/drawing/2010/main" xmlns="" w="9525">
                   <a:solidFill>
                     <a:srgbClr val="000000"/>
                   </a:solidFill>
@@ -2137,7 +2137,7 @@
             </a:ln>
             <a:extLst>
               <a:ext uri="{91240B29-F687-4f45-9708-019B960494DF}">
-                <a14:hiddenLine xmlns="" xmlns:a14="http://schemas.microsoft.com/office/drawing/2010/main" w="9525">
+                <a14:hiddenLine xmlns:a14="http://schemas.microsoft.com/office/drawing/2010/main" xmlns="" w="9525">
                   <a:solidFill>
                     <a:srgbClr val="000000"/>
                   </a:solidFill>
@@ -2227,7 +2227,7 @@
             </a:ln>
             <a:extLst>
               <a:ext uri="{91240B29-F687-4f45-9708-019B960494DF}">
-                <a14:hiddenLine xmlns="" xmlns:a14="http://schemas.microsoft.com/office/drawing/2010/main" w="9525">
+                <a14:hiddenLine xmlns:a14="http://schemas.microsoft.com/office/drawing/2010/main" xmlns="" w="9525">
                   <a:solidFill>
                     <a:srgbClr val="000000"/>
                   </a:solidFill>
@@ -2283,7 +2283,7 @@
             </a:ln>
             <a:extLst>
               <a:ext uri="{91240B29-F687-4f45-9708-019B960494DF}">
-                <a14:hiddenLine xmlns="" xmlns:a14="http://schemas.microsoft.com/office/drawing/2010/main" w="9525">
+                <a14:hiddenLine xmlns:a14="http://schemas.microsoft.com/office/drawing/2010/main" xmlns="" w="9525">
                   <a:solidFill>
                     <a:srgbClr val="000000"/>
                   </a:solidFill>
@@ -2373,7 +2373,7 @@
             </a:ln>
             <a:extLst>
               <a:ext uri="{91240B29-F687-4f45-9708-019B960494DF}">
-                <a14:hiddenLine xmlns="" xmlns:a14="http://schemas.microsoft.com/office/drawing/2010/main" w="9525">
+                <a14:hiddenLine xmlns:a14="http://schemas.microsoft.com/office/drawing/2010/main" xmlns="" w="9525">
                   <a:solidFill>
                     <a:srgbClr val="000000"/>
                   </a:solidFill>
@@ -2441,7 +2441,7 @@
             </a:ln>
             <a:extLst>
               <a:ext uri="{91240B29-F687-4f45-9708-019B960494DF}">
-                <a14:hiddenLine xmlns="" xmlns:a14="http://schemas.microsoft.com/office/drawing/2010/main" w="9525">
+                <a14:hiddenLine xmlns:a14="http://schemas.microsoft.com/office/drawing/2010/main" xmlns="" w="9525">
                   <a:solidFill>
                     <a:srgbClr val="000000"/>
                   </a:solidFill>
@@ -2531,7 +2531,7 @@
             </a:ln>
             <a:extLst>
               <a:ext uri="{91240B29-F687-4f45-9708-019B960494DF}">
-                <a14:hiddenLine xmlns="" xmlns:a14="http://schemas.microsoft.com/office/drawing/2010/main" w="9525">
+                <a14:hiddenLine xmlns:a14="http://schemas.microsoft.com/office/drawing/2010/main" xmlns="" w="9525">
                   <a:solidFill>
                     <a:srgbClr val="000000"/>
                   </a:solidFill>
@@ -2599,7 +2599,7 @@
             </a:ln>
             <a:extLst>
               <a:ext uri="{91240B29-F687-4f45-9708-019B960494DF}">
-                <a14:hiddenLine xmlns="" xmlns:a14="http://schemas.microsoft.com/office/drawing/2010/main" w="9525">
+                <a14:hiddenLine xmlns:a14="http://schemas.microsoft.com/office/drawing/2010/main" xmlns="" w="9525">
                   <a:solidFill>
                     <a:srgbClr val="000000"/>
                   </a:solidFill>
@@ -2689,7 +2689,7 @@
             </a:ln>
             <a:extLst>
               <a:ext uri="{91240B29-F687-4f45-9708-019B960494DF}">
-                <a14:hiddenLine xmlns="" xmlns:a14="http://schemas.microsoft.com/office/drawing/2010/main" w="9525">
+                <a14:hiddenLine xmlns:a14="http://schemas.microsoft.com/office/drawing/2010/main" xmlns="" w="9525">
                   <a:solidFill>
                     <a:srgbClr val="000000"/>
                   </a:solidFill>
@@ -2723,7 +2723,7 @@
             </a:ln>
             <a:extLst>
               <a:ext uri="{91240B29-F687-4f45-9708-019B960494DF}">
-                <a14:hiddenLine xmlns="" xmlns:a14="http://schemas.microsoft.com/office/drawing/2010/main" w="9525">
+                <a14:hiddenLine xmlns:a14="http://schemas.microsoft.com/office/drawing/2010/main" xmlns="" w="9525">
                   <a:solidFill>
                     <a:srgbClr val="000000"/>
                   </a:solidFill>
@@ -2813,7 +2813,7 @@
             </a:ln>
             <a:extLst>
               <a:ext uri="{91240B29-F687-4f45-9708-019B960494DF}">
-                <a14:hiddenLine xmlns="" xmlns:a14="http://schemas.microsoft.com/office/drawing/2010/main" w="9525">
+                <a14:hiddenLine xmlns:a14="http://schemas.microsoft.com/office/drawing/2010/main" xmlns="" w="9525">
                   <a:solidFill>
                     <a:srgbClr val="000000"/>
                   </a:solidFill>
@@ -2875,7 +2875,7 @@
             </a:ln>
             <a:extLst>
               <a:ext uri="{91240B29-F687-4f45-9708-019B960494DF}">
-                <a14:hiddenLine xmlns="" xmlns:a14="http://schemas.microsoft.com/office/drawing/2010/main" w="9525">
+                <a14:hiddenLine xmlns:a14="http://schemas.microsoft.com/office/drawing/2010/main" xmlns="" w="9525">
                   <a:solidFill>
                     <a:srgbClr val="000000"/>
                   </a:solidFill>
@@ -2937,7 +2937,7 @@
             </a:ln>
             <a:extLst>
               <a:ext uri="{91240B29-F687-4f45-9708-019B960494DF}">
-                <a14:hiddenLine xmlns="" xmlns:a14="http://schemas.microsoft.com/office/drawing/2010/main" w="9525">
+                <a14:hiddenLine xmlns:a14="http://schemas.microsoft.com/office/drawing/2010/main" xmlns="" w="9525">
                   <a:solidFill>
                     <a:srgbClr val="000000"/>
                   </a:solidFill>
@@ -3027,7 +3027,7 @@
             </a:ln>
             <a:extLst>
               <a:ext uri="{91240B29-F687-4f45-9708-019B960494DF}">
-                <a14:hiddenLine xmlns="" xmlns:a14="http://schemas.microsoft.com/office/drawing/2010/main" w="9525">
+                <a14:hiddenLine xmlns:a14="http://schemas.microsoft.com/office/drawing/2010/main" xmlns="" w="9525">
                   <a:solidFill>
                     <a:srgbClr val="000000"/>
                   </a:solidFill>
@@ -3095,7 +3095,7 @@
             </a:ln>
             <a:extLst>
               <a:ext uri="{91240B29-F687-4f45-9708-019B960494DF}">
-                <a14:hiddenLine xmlns="" xmlns:a14="http://schemas.microsoft.com/office/drawing/2010/main" w="9525">
+                <a14:hiddenLine xmlns:a14="http://schemas.microsoft.com/office/drawing/2010/main" xmlns="" w="9525">
                   <a:solidFill>
                     <a:srgbClr val="000000"/>
                   </a:solidFill>
@@ -3157,7 +3157,7 @@
             </a:ln>
             <a:extLst>
               <a:ext uri="{91240B29-F687-4f45-9708-019B960494DF}">
-                <a14:hiddenLine xmlns="" xmlns:a14="http://schemas.microsoft.com/office/drawing/2010/main" w="9525">
+                <a14:hiddenLine xmlns:a14="http://schemas.microsoft.com/office/drawing/2010/main" xmlns="" w="9525">
                   <a:solidFill>
                     <a:srgbClr val="000000"/>
                   </a:solidFill>
@@ -3247,7 +3247,7 @@
             </a:ln>
             <a:extLst>
               <a:ext uri="{91240B29-F687-4f45-9708-019B960494DF}">
-                <a14:hiddenLine xmlns="" xmlns:a14="http://schemas.microsoft.com/office/drawing/2010/main" w="9525">
+                <a14:hiddenLine xmlns:a14="http://schemas.microsoft.com/office/drawing/2010/main" xmlns="" w="9525">
                   <a:solidFill>
                     <a:srgbClr val="000000"/>
                   </a:solidFill>
@@ -3309,7 +3309,7 @@
             </a:ln>
             <a:extLst>
               <a:ext uri="{91240B29-F687-4f45-9708-019B960494DF}">
-                <a14:hiddenLine xmlns="" xmlns:a14="http://schemas.microsoft.com/office/drawing/2010/main" w="9525">
+                <a14:hiddenLine xmlns:a14="http://schemas.microsoft.com/office/drawing/2010/main" xmlns="" w="9525">
                   <a:solidFill>
                     <a:srgbClr val="000000"/>
                   </a:solidFill>
@@ -3399,7 +3399,7 @@
             </a:ln>
             <a:extLst>
               <a:ext uri="{91240B29-F687-4f45-9708-019B960494DF}">
-                <a14:hiddenLine xmlns="" xmlns:a14="http://schemas.microsoft.com/office/drawing/2010/main" w="9525">
+                <a14:hiddenLine xmlns:a14="http://schemas.microsoft.com/office/drawing/2010/main" xmlns="" w="9525">
                   <a:solidFill>
                     <a:srgbClr val="000000"/>
                   </a:solidFill>
@@ -3461,7 +3461,7 @@
             </a:ln>
             <a:extLst>
               <a:ext uri="{91240B29-F687-4f45-9708-019B960494DF}">
-                <a14:hiddenLine xmlns="" xmlns:a14="http://schemas.microsoft.com/office/drawing/2010/main" w="9525">
+                <a14:hiddenLine xmlns:a14="http://schemas.microsoft.com/office/drawing/2010/main" xmlns="" w="9525">
                   <a:solidFill>
                     <a:srgbClr val="000000"/>
                   </a:solidFill>
@@ -3551,7 +3551,7 @@
             </a:ln>
             <a:extLst>
               <a:ext uri="{91240B29-F687-4f45-9708-019B960494DF}">
-                <a14:hiddenLine xmlns="" xmlns:a14="http://schemas.microsoft.com/office/drawing/2010/main" w="9525">
+                <a14:hiddenLine xmlns:a14="http://schemas.microsoft.com/office/drawing/2010/main" xmlns="" w="9525">
                   <a:solidFill>
                     <a:srgbClr val="000000"/>
                   </a:solidFill>
@@ -3585,7 +3585,7 @@
             </a:ln>
             <a:extLst>
               <a:ext uri="{91240B29-F687-4f45-9708-019B960494DF}">
-                <a14:hiddenLine xmlns="" xmlns:a14="http://schemas.microsoft.com/office/drawing/2010/main" w="9525">
+                <a14:hiddenLine xmlns:a14="http://schemas.microsoft.com/office/drawing/2010/main" xmlns="" w="9525">
                   <a:solidFill>
                     <a:srgbClr val="000000"/>
                   </a:solidFill>
@@ -3650,7 +3650,7 @@
             </a:ln>
             <a:extLst>
               <a:ext uri="{91240B29-F687-4f45-9708-019B960494DF}">
-                <a14:hiddenLine xmlns="" xmlns:a14="http://schemas.microsoft.com/office/drawing/2010/main" w="9525">
+                <a14:hiddenLine xmlns:a14="http://schemas.microsoft.com/office/drawing/2010/main" xmlns="" w="9525">
                   <a:solidFill>
                     <a:srgbClr val="000000"/>
                   </a:solidFill>
@@ -3740,7 +3740,7 @@
             </a:ln>
             <a:extLst>
               <a:ext uri="{91240B29-F687-4f45-9708-019B960494DF}">
-                <a14:hiddenLine xmlns="" xmlns:a14="http://schemas.microsoft.com/office/drawing/2010/main" w="9525">
+                <a14:hiddenLine xmlns:a14="http://schemas.microsoft.com/office/drawing/2010/main" xmlns="" w="9525">
                   <a:solidFill>
                     <a:srgbClr val="000000"/>
                   </a:solidFill>
@@ -3802,7 +3802,7 @@
             </a:ln>
             <a:extLst>
               <a:ext uri="{91240B29-F687-4f45-9708-019B960494DF}">
-                <a14:hiddenLine xmlns="" xmlns:a14="http://schemas.microsoft.com/office/drawing/2010/main" w="9525">
+                <a14:hiddenLine xmlns:a14="http://schemas.microsoft.com/office/drawing/2010/main" xmlns="" w="9525">
                   <a:solidFill>
                     <a:srgbClr val="000000"/>
                   </a:solidFill>
@@ -3892,7 +3892,7 @@
             </a:ln>
             <a:extLst>
               <a:ext uri="{91240B29-F687-4f45-9708-019B960494DF}">
-                <a14:hiddenLine xmlns="" xmlns:a14="http://schemas.microsoft.com/office/drawing/2010/main" w="9525">
+                <a14:hiddenLine xmlns:a14="http://schemas.microsoft.com/office/drawing/2010/main" xmlns="" w="9525">
                   <a:solidFill>
                     <a:srgbClr val="000000"/>
                   </a:solidFill>
@@ -3982,7 +3982,7 @@
             </a:ln>
             <a:extLst>
               <a:ext uri="{91240B29-F687-4f45-9708-019B960494DF}">
-                <a14:hiddenLine xmlns="" xmlns:a14="http://schemas.microsoft.com/office/drawing/2010/main" w="9525">
+                <a14:hiddenLine xmlns:a14="http://schemas.microsoft.com/office/drawing/2010/main" xmlns="" w="9525">
                   <a:solidFill>
                     <a:srgbClr val="000000"/>
                   </a:solidFill>
@@ -4047,7 +4047,7 @@
             </a:ln>
             <a:extLst>
               <a:ext uri="{91240B29-F687-4f45-9708-019B960494DF}">
-                <a14:hiddenLine xmlns="" xmlns:a14="http://schemas.microsoft.com/office/drawing/2010/main" w="9525">
+                <a14:hiddenLine xmlns:a14="http://schemas.microsoft.com/office/drawing/2010/main" xmlns="" w="9525">
                   <a:solidFill>
                     <a:srgbClr val="000000"/>
                   </a:solidFill>
@@ -4109,7 +4109,7 @@
             </a:ln>
             <a:extLst>
               <a:ext uri="{91240B29-F687-4f45-9708-019B960494DF}">
-                <a14:hiddenLine xmlns="" xmlns:a14="http://schemas.microsoft.com/office/drawing/2010/main" w="9525">
+                <a14:hiddenLine xmlns:a14="http://schemas.microsoft.com/office/drawing/2010/main" xmlns="" w="9525">
                   <a:solidFill>
                     <a:srgbClr val="000000"/>
                   </a:solidFill>
@@ -4199,7 +4199,7 @@
             </a:ln>
             <a:extLst>
               <a:ext uri="{91240B29-F687-4f45-9708-019B960494DF}">
-                <a14:hiddenLine xmlns="" xmlns:a14="http://schemas.microsoft.com/office/drawing/2010/main" w="9525">
+                <a14:hiddenLine xmlns:a14="http://schemas.microsoft.com/office/drawing/2010/main" xmlns="" w="9525">
                   <a:solidFill>
                     <a:srgbClr val="000000"/>
                   </a:solidFill>
@@ -4289,7 +4289,7 @@
             </a:ln>
             <a:extLst>
               <a:ext uri="{91240B29-F687-4f45-9708-019B960494DF}">
-                <a14:hiddenLine xmlns="" xmlns:a14="http://schemas.microsoft.com/office/drawing/2010/main" w="9525">
+                <a14:hiddenLine xmlns:a14="http://schemas.microsoft.com/office/drawing/2010/main" xmlns="" w="9525">
                   <a:solidFill>
                     <a:srgbClr val="000000"/>
                   </a:solidFill>
@@ -4351,7 +4351,7 @@
             </a:ln>
             <a:extLst>
               <a:ext uri="{91240B29-F687-4f45-9708-019B960494DF}">
-                <a14:hiddenLine xmlns="" xmlns:a14="http://schemas.microsoft.com/office/drawing/2010/main" w="9525">
+                <a14:hiddenLine xmlns:a14="http://schemas.microsoft.com/office/drawing/2010/main" xmlns="" w="9525">
                   <a:solidFill>
                     <a:srgbClr val="000000"/>
                   </a:solidFill>
@@ -4471,7 +4471,7 @@
             </a:ln>
             <a:extLst>
               <a:ext uri="{91240B29-F687-4f45-9708-019B960494DF}">
-                <a14:hiddenLine xmlns="" xmlns:a14="http://schemas.microsoft.com/office/drawing/2010/main" w="9525">
+                <a14:hiddenLine xmlns:a14="http://schemas.microsoft.com/office/drawing/2010/main" xmlns="" w="9525">
                   <a:solidFill>
                     <a:srgbClr val="000000"/>
                   </a:solidFill>
@@ -4539,7 +4539,7 @@
             </a:ln>
             <a:extLst>
               <a:ext uri="{91240B29-F687-4f45-9708-019B960494DF}">
-                <a14:hiddenLine xmlns="" xmlns:a14="http://schemas.microsoft.com/office/drawing/2010/main" w="9525">
+                <a14:hiddenLine xmlns:a14="http://schemas.microsoft.com/office/drawing/2010/main" xmlns="" w="9525">
                   <a:solidFill>
                     <a:srgbClr val="000000"/>
                   </a:solidFill>
@@ -4629,7 +4629,7 @@
             </a:ln>
             <a:extLst>
               <a:ext uri="{91240B29-F687-4f45-9708-019B960494DF}">
-                <a14:hiddenLine xmlns="" xmlns:a14="http://schemas.microsoft.com/office/drawing/2010/main" w="9525">
+                <a14:hiddenLine xmlns:a14="http://schemas.microsoft.com/office/drawing/2010/main" xmlns="" w="9525">
                   <a:solidFill>
                     <a:srgbClr val="000000"/>
                   </a:solidFill>
@@ -4769,7 +4769,7 @@
           <a:p>
             <a:fld id="{A3195221-79EA-9D42-9404-49B04A8A98FE}" type="datetime1">
               <a:rPr lang="en-US" smtClean="0"/>
-              <a:t>9/16/25</a:t>
+              <a:t>2/26/26</a:t>
             </a:fld>
             <a:endParaRPr lang="en-US"/>
           </a:p>
@@ -5036,7 +5036,7 @@
           <a:p>
             <a:fld id="{CF5CAC72-1054-5349-B819-EC5816012906}" type="datetime1">
               <a:rPr lang="en-US" smtClean="0"/>
-              <a:t>9/16/25</a:t>
+              <a:t>2/26/26</a:t>
             </a:fld>
             <a:endParaRPr lang="en-US"/>
           </a:p>
@@ -5232,7 +5232,7 @@
           <a:p>
             <a:fld id="{B2AEA80C-9698-6B49-AF03-BA3E91654186}" type="datetime1">
               <a:rPr lang="en-US" smtClean="0"/>
-              <a:t>9/16/25</a:t>
+              <a:t>2/26/26</a:t>
             </a:fld>
             <a:endParaRPr lang="en-US"/>
           </a:p>
@@ -5495,7 +5495,7 @@
           <a:p>
             <a:fld id="{EA7D610D-B844-3A4B-9828-A3C0146A0045}" type="datetime1">
               <a:rPr lang="en-US" smtClean="0"/>
-              <a:t>9/16/25</a:t>
+              <a:t>2/26/26</a:t>
             </a:fld>
             <a:endParaRPr lang="en-US"/>
           </a:p>
@@ -5929,7 +5929,7 @@
           <a:p>
             <a:fld id="{31993245-F9CB-F248-B658-090812430620}" type="datetime1">
               <a:rPr lang="en-US" smtClean="0"/>
-              <a:t>9/16/25</a:t>
+              <a:t>2/26/26</a:t>
             </a:fld>
             <a:endParaRPr lang="en-US"/>
           </a:p>
@@ -6475,7 +6475,7 @@
           <a:p>
             <a:fld id="{D57A3EA2-D4AF-154F-B9E4-E56A24E64A69}" type="datetime1">
               <a:rPr lang="en-US" smtClean="0"/>
-              <a:t>9/16/25</a:t>
+              <a:t>2/26/26</a:t>
             </a:fld>
             <a:endParaRPr lang="en-US"/>
           </a:p>
@@ -7195,7 +7195,7 @@
           <a:p>
             <a:fld id="{CA89C3C0-B8DA-2947-9D8B-FC36B7912149}" type="datetime1">
               <a:rPr lang="en-US" smtClean="0"/>
-              <a:t>9/16/25</a:t>
+              <a:t>2/26/26</a:t>
             </a:fld>
             <a:endParaRPr lang="en-US"/>
           </a:p>
@@ -7365,7 +7365,7 @@
           <a:p>
             <a:fld id="{9C6875AB-3A7F-F044-91E5-B05AA8DCDB7D}" type="datetime1">
               <a:rPr lang="en-US" smtClean="0"/>
-              <a:t>9/16/25</a:t>
+              <a:t>2/26/26</a:t>
             </a:fld>
             <a:endParaRPr lang="en-US"/>
           </a:p>
@@ -7545,7 +7545,7 @@
           <a:p>
             <a:fld id="{CBF5F35A-0699-3649-A13E-ECA0919D0BEE}" type="datetime1">
               <a:rPr lang="en-US" smtClean="0"/>
-              <a:t>9/16/25</a:t>
+              <a:t>2/26/26</a:t>
             </a:fld>
             <a:endParaRPr lang="en-US"/>
           </a:p>
@@ -7715,7 +7715,7 @@
           <a:p>
             <a:fld id="{B1AE6046-C0D1-204B-BBFD-D30F3D59F0C6}" type="datetime1">
               <a:rPr lang="en-US" smtClean="0"/>
-              <a:t>9/16/25</a:t>
+              <a:t>2/26/26</a:t>
             </a:fld>
             <a:endParaRPr lang="en-US"/>
           </a:p>
@@ -7965,7 +7965,7 @@
           <a:p>
             <a:fld id="{98FCD73B-A524-6648-B3C8-00881046033F}" type="datetime1">
               <a:rPr lang="en-US" smtClean="0"/>
-              <a:t>9/16/25</a:t>
+              <a:t>2/26/26</a:t>
             </a:fld>
             <a:endParaRPr lang="en-US"/>
           </a:p>
@@ -8197,7 +8197,7 @@
           <a:p>
             <a:fld id="{708FB6FC-D15B-9B4D-BAF7-B376DC2D833C}" type="datetime1">
               <a:rPr lang="en-US" smtClean="0"/>
-              <a:t>9/16/25</a:t>
+              <a:t>2/26/26</a:t>
             </a:fld>
             <a:endParaRPr lang="en-US"/>
           </a:p>
@@ -8583,7 +8583,7 @@
           <a:p>
             <a:fld id="{1F0F0D92-C3CC-CF46-AB4F-19D71E204EF6}" type="datetime1">
               <a:rPr lang="en-US" smtClean="0"/>
-              <a:t>9/16/25</a:t>
+              <a:t>2/26/26</a:t>
             </a:fld>
             <a:endParaRPr lang="en-US"/>
           </a:p>
@@ -8706,7 +8706,7 @@
           <a:p>
             <a:fld id="{C4EC1D0C-6CF0-1E41-AA89-F332E723F52A}" type="datetime1">
               <a:rPr lang="en-US" smtClean="0"/>
-              <a:t>9/16/25</a:t>
+              <a:t>2/26/26</a:t>
             </a:fld>
             <a:endParaRPr lang="en-US"/>
           </a:p>
@@ -8801,7 +8801,7 @@
           <a:p>
             <a:fld id="{6D029F41-0600-3A49-A738-B6A30278C01E}" type="datetime1">
               <a:rPr lang="en-US" smtClean="0"/>
-              <a:t>9/16/25</a:t>
+              <a:t>2/26/26</a:t>
             </a:fld>
             <a:endParaRPr lang="en-US"/>
           </a:p>
@@ -9050,7 +9050,7 @@
           <a:p>
             <a:fld id="{DD8BB7CF-3211-0C4C-BF98-05F94ED81F47}" type="datetime1">
               <a:rPr lang="en-US" smtClean="0"/>
-              <a:t>9/16/25</a:t>
+              <a:t>2/26/26</a:t>
             </a:fld>
             <a:endParaRPr lang="en-US"/>
           </a:p>
@@ -9335,7 +9335,7 @@
           <a:p>
             <a:fld id="{5966A86B-713D-3F41-BD30-E73F286D8C94}" type="datetime1">
               <a:rPr lang="en-US" smtClean="0"/>
-              <a:t>9/16/25</a:t>
+              <a:t>2/26/26</a:t>
             </a:fld>
             <a:endParaRPr lang="en-US"/>
           </a:p>
@@ -9458,7 +9458,7 @@
           <a:noFill/>
           <a:extLst>
             <a:ext uri="{909E8E84-426E-40dd-AFC4-6F175D3DCCD1}">
-              <a14:hiddenFill xmlns="" xmlns:a14="http://schemas.microsoft.com/office/drawing/2010/main">
+              <a14:hiddenFill xmlns:a14="http://schemas.microsoft.com/office/drawing/2010/main" xmlns="">
                 <a:solidFill>
                   <a:srgbClr val="FFFFFF"/>
                 </a:solidFill>
@@ -9532,7 +9532,7 @@
               </a:ln>
               <a:extLst>
                 <a:ext uri="{91240B29-F687-4f45-9708-019B960494DF}">
-                  <a14:hiddenLine xmlns="" xmlns:a14="http://schemas.microsoft.com/office/drawing/2010/main" w="9525">
+                  <a14:hiddenLine xmlns:a14="http://schemas.microsoft.com/office/drawing/2010/main" xmlns="" w="9525">
                     <a:solidFill>
                       <a:srgbClr val="000000"/>
                     </a:solidFill>
@@ -9622,7 +9622,7 @@
               </a:ln>
               <a:extLst>
                 <a:ext uri="{91240B29-F687-4f45-9708-019B960494DF}">
-                  <a14:hiddenLine xmlns="" xmlns:a14="http://schemas.microsoft.com/office/drawing/2010/main" w="9525">
+                  <a14:hiddenLine xmlns:a14="http://schemas.microsoft.com/office/drawing/2010/main" xmlns="" w="9525">
                     <a:solidFill>
                       <a:srgbClr val="000000"/>
                     </a:solidFill>
@@ -9712,7 +9712,7 @@
               </a:ln>
               <a:extLst>
                 <a:ext uri="{91240B29-F687-4f45-9708-019B960494DF}">
-                  <a14:hiddenLine xmlns="" xmlns:a14="http://schemas.microsoft.com/office/drawing/2010/main" w="9525">
+                  <a14:hiddenLine xmlns:a14="http://schemas.microsoft.com/office/drawing/2010/main" xmlns="" w="9525">
                     <a:solidFill>
                       <a:srgbClr val="000000"/>
                     </a:solidFill>
@@ -9774,7 +9774,7 @@
               </a:ln>
               <a:extLst>
                 <a:ext uri="{91240B29-F687-4f45-9708-019B960494DF}">
-                  <a14:hiddenLine xmlns="" xmlns:a14="http://schemas.microsoft.com/office/drawing/2010/main" w="9525">
+                  <a14:hiddenLine xmlns:a14="http://schemas.microsoft.com/office/drawing/2010/main" xmlns="" w="9525">
                     <a:solidFill>
                       <a:srgbClr val="000000"/>
                     </a:solidFill>
@@ -9864,7 +9864,7 @@
               </a:ln>
               <a:extLst>
                 <a:ext uri="{91240B29-F687-4f45-9708-019B960494DF}">
-                  <a14:hiddenLine xmlns="" xmlns:a14="http://schemas.microsoft.com/office/drawing/2010/main" w="9525">
+                  <a14:hiddenLine xmlns:a14="http://schemas.microsoft.com/office/drawing/2010/main" xmlns="" w="9525">
                     <a:solidFill>
                       <a:srgbClr val="000000"/>
                     </a:solidFill>
@@ -9926,7 +9926,7 @@
               </a:ln>
               <a:extLst>
                 <a:ext uri="{91240B29-F687-4f45-9708-019B960494DF}">
-                  <a14:hiddenLine xmlns="" xmlns:a14="http://schemas.microsoft.com/office/drawing/2010/main" w="9525">
+                  <a14:hiddenLine xmlns:a14="http://schemas.microsoft.com/office/drawing/2010/main" xmlns="" w="9525">
                     <a:solidFill>
                       <a:srgbClr val="000000"/>
                     </a:solidFill>
@@ -9988,7 +9988,7 @@
               </a:ln>
               <a:extLst>
                 <a:ext uri="{91240B29-F687-4f45-9708-019B960494DF}">
-                  <a14:hiddenLine xmlns="" xmlns:a14="http://schemas.microsoft.com/office/drawing/2010/main" w="9525">
+                  <a14:hiddenLine xmlns:a14="http://schemas.microsoft.com/office/drawing/2010/main" xmlns="" w="9525">
                     <a:solidFill>
                       <a:srgbClr val="000000"/>
                     </a:solidFill>
@@ -10078,7 +10078,7 @@
               </a:ln>
               <a:extLst>
                 <a:ext uri="{91240B29-F687-4f45-9708-019B960494DF}">
-                  <a14:hiddenLine xmlns="" xmlns:a14="http://schemas.microsoft.com/office/drawing/2010/main" w="9525">
+                  <a14:hiddenLine xmlns:a14="http://schemas.microsoft.com/office/drawing/2010/main" xmlns="" w="9525">
                     <a:solidFill>
                       <a:srgbClr val="000000"/>
                     </a:solidFill>
@@ -10168,7 +10168,7 @@
               </a:ln>
               <a:extLst>
                 <a:ext uri="{91240B29-F687-4f45-9708-019B960494DF}">
-                  <a14:hiddenLine xmlns="" xmlns:a14="http://schemas.microsoft.com/office/drawing/2010/main" w="9525">
+                  <a14:hiddenLine xmlns:a14="http://schemas.microsoft.com/office/drawing/2010/main" xmlns="" w="9525">
                     <a:solidFill>
                       <a:srgbClr val="000000"/>
                     </a:solidFill>
@@ -10230,7 +10230,7 @@
               </a:ln>
               <a:extLst>
                 <a:ext uri="{91240B29-F687-4f45-9708-019B960494DF}">
-                  <a14:hiddenLine xmlns="" xmlns:a14="http://schemas.microsoft.com/office/drawing/2010/main" w="9525">
+                  <a14:hiddenLine xmlns:a14="http://schemas.microsoft.com/office/drawing/2010/main" xmlns="" w="9525">
                     <a:solidFill>
                       <a:srgbClr val="000000"/>
                     </a:solidFill>
@@ -10340,7 +10340,7 @@
               </a:ln>
               <a:extLst>
                 <a:ext uri="{91240B29-F687-4f45-9708-019B960494DF}">
-                  <a14:hiddenLine xmlns="" xmlns:a14="http://schemas.microsoft.com/office/drawing/2010/main" w="9525">
+                  <a14:hiddenLine xmlns:a14="http://schemas.microsoft.com/office/drawing/2010/main" xmlns="" w="9525">
                     <a:solidFill>
                       <a:srgbClr val="000000"/>
                     </a:solidFill>
@@ -10424,7 +10424,7 @@
               </a:ln>
               <a:extLst>
                 <a:ext uri="{91240B29-F687-4f45-9708-019B960494DF}">
-                  <a14:hiddenLine xmlns="" xmlns:a14="http://schemas.microsoft.com/office/drawing/2010/main" w="9525">
+                  <a14:hiddenLine xmlns:a14="http://schemas.microsoft.com/office/drawing/2010/main" xmlns="" w="9525">
                     <a:solidFill>
                       <a:srgbClr val="000000"/>
                     </a:solidFill>
@@ -10486,7 +10486,7 @@
               </a:ln>
               <a:extLst>
                 <a:ext uri="{91240B29-F687-4f45-9708-019B960494DF}">
-                  <a14:hiddenLine xmlns="" xmlns:a14="http://schemas.microsoft.com/office/drawing/2010/main" w="9525">
+                  <a14:hiddenLine xmlns:a14="http://schemas.microsoft.com/office/drawing/2010/main" xmlns="" w="9525">
                     <a:solidFill>
                       <a:srgbClr val="000000"/>
                     </a:solidFill>
@@ -10548,7 +10548,7 @@
               </a:ln>
               <a:extLst>
                 <a:ext uri="{91240B29-F687-4f45-9708-019B960494DF}">
-                  <a14:hiddenLine xmlns="" xmlns:a14="http://schemas.microsoft.com/office/drawing/2010/main" w="9525">
+                  <a14:hiddenLine xmlns:a14="http://schemas.microsoft.com/office/drawing/2010/main" xmlns="" w="9525">
                     <a:solidFill>
                       <a:srgbClr val="000000"/>
                     </a:solidFill>
@@ -10638,7 +10638,7 @@
               </a:ln>
               <a:extLst>
                 <a:ext uri="{91240B29-F687-4f45-9708-019B960494DF}">
-                  <a14:hiddenLine xmlns="" xmlns:a14="http://schemas.microsoft.com/office/drawing/2010/main" w="9525">
+                  <a14:hiddenLine xmlns:a14="http://schemas.microsoft.com/office/drawing/2010/main" xmlns="" w="9525">
                     <a:solidFill>
                       <a:srgbClr val="000000"/>
                     </a:solidFill>
@@ -10672,7 +10672,7 @@
               </a:ln>
               <a:extLst>
                 <a:ext uri="{91240B29-F687-4f45-9708-019B960494DF}">
-                  <a14:hiddenLine xmlns="" xmlns:a14="http://schemas.microsoft.com/office/drawing/2010/main" w="9525">
+                  <a14:hiddenLine xmlns:a14="http://schemas.microsoft.com/office/drawing/2010/main" xmlns="" w="9525">
                     <a:solidFill>
                       <a:srgbClr val="000000"/>
                     </a:solidFill>
@@ -10737,7 +10737,7 @@
               </a:ln>
               <a:extLst>
                 <a:ext uri="{91240B29-F687-4f45-9708-019B960494DF}">
-                  <a14:hiddenLine xmlns="" xmlns:a14="http://schemas.microsoft.com/office/drawing/2010/main" w="9525">
+                  <a14:hiddenLine xmlns:a14="http://schemas.microsoft.com/office/drawing/2010/main" xmlns="" w="9525">
                     <a:solidFill>
                       <a:srgbClr val="000000"/>
                     </a:solidFill>
@@ -10827,7 +10827,7 @@
               </a:ln>
               <a:extLst>
                 <a:ext uri="{91240B29-F687-4f45-9708-019B960494DF}">
-                  <a14:hiddenLine xmlns="" xmlns:a14="http://schemas.microsoft.com/office/drawing/2010/main" w="9525">
+                  <a14:hiddenLine xmlns:a14="http://schemas.microsoft.com/office/drawing/2010/main" xmlns="" w="9525">
                     <a:solidFill>
                       <a:srgbClr val="000000"/>
                     </a:solidFill>
@@ -10889,7 +10889,7 @@
               </a:ln>
               <a:extLst>
                 <a:ext uri="{91240B29-F687-4f45-9708-019B960494DF}">
-                  <a14:hiddenLine xmlns="" xmlns:a14="http://schemas.microsoft.com/office/drawing/2010/main" w="9525">
+                  <a14:hiddenLine xmlns:a14="http://schemas.microsoft.com/office/drawing/2010/main" xmlns="" w="9525">
                     <a:solidFill>
                       <a:srgbClr val="000000"/>
                     </a:solidFill>
@@ -10979,7 +10979,7 @@
               </a:ln>
               <a:extLst>
                 <a:ext uri="{91240B29-F687-4f45-9708-019B960494DF}">
-                  <a14:hiddenLine xmlns="" xmlns:a14="http://schemas.microsoft.com/office/drawing/2010/main" w="9525">
+                  <a14:hiddenLine xmlns:a14="http://schemas.microsoft.com/office/drawing/2010/main" xmlns="" w="9525">
                     <a:solidFill>
                       <a:srgbClr val="000000"/>
                     </a:solidFill>
@@ -11044,7 +11044,7 @@
               </a:ln>
               <a:extLst>
                 <a:ext uri="{91240B29-F687-4f45-9708-019B960494DF}">
-                  <a14:hiddenLine xmlns="" xmlns:a14="http://schemas.microsoft.com/office/drawing/2010/main" w="9525">
+                  <a14:hiddenLine xmlns:a14="http://schemas.microsoft.com/office/drawing/2010/main" xmlns="" w="9525">
                     <a:solidFill>
                       <a:srgbClr val="000000"/>
                     </a:solidFill>
@@ -11106,7 +11106,7 @@
               </a:ln>
               <a:extLst>
                 <a:ext uri="{91240B29-F687-4f45-9708-019B960494DF}">
-                  <a14:hiddenLine xmlns="" xmlns:a14="http://schemas.microsoft.com/office/drawing/2010/main" w="9525">
+                  <a14:hiddenLine xmlns:a14="http://schemas.microsoft.com/office/drawing/2010/main" xmlns="" w="9525">
                     <a:solidFill>
                       <a:srgbClr val="000000"/>
                     </a:solidFill>
@@ -11196,7 +11196,7 @@
               </a:ln>
               <a:extLst>
                 <a:ext uri="{91240B29-F687-4f45-9708-019B960494DF}">
-                  <a14:hiddenLine xmlns="" xmlns:a14="http://schemas.microsoft.com/office/drawing/2010/main" w="9525">
+                  <a14:hiddenLine xmlns:a14="http://schemas.microsoft.com/office/drawing/2010/main" xmlns="" w="9525">
                     <a:solidFill>
                       <a:srgbClr val="000000"/>
                     </a:solidFill>
@@ -11286,7 +11286,7 @@
               </a:ln>
               <a:extLst>
                 <a:ext uri="{91240B29-F687-4f45-9708-019B960494DF}">
-                  <a14:hiddenLine xmlns="" xmlns:a14="http://schemas.microsoft.com/office/drawing/2010/main" w="9525">
+                  <a14:hiddenLine xmlns:a14="http://schemas.microsoft.com/office/drawing/2010/main" xmlns="" w="9525">
                     <a:solidFill>
                       <a:srgbClr val="000000"/>
                     </a:solidFill>
@@ -11351,7 +11351,7 @@
               </a:ln>
               <a:extLst>
                 <a:ext uri="{91240B29-F687-4f45-9708-019B960494DF}">
-                  <a14:hiddenLine xmlns="" xmlns:a14="http://schemas.microsoft.com/office/drawing/2010/main" w="9525">
+                  <a14:hiddenLine xmlns:a14="http://schemas.microsoft.com/office/drawing/2010/main" xmlns="" w="9525">
                     <a:solidFill>
                       <a:srgbClr val="000000"/>
                     </a:solidFill>
@@ -11471,7 +11471,7 @@
               </a:ln>
               <a:extLst>
                 <a:ext uri="{91240B29-F687-4f45-9708-019B960494DF}">
-                  <a14:hiddenLine xmlns="" xmlns:a14="http://schemas.microsoft.com/office/drawing/2010/main" w="9525">
+                  <a14:hiddenLine xmlns:a14="http://schemas.microsoft.com/office/drawing/2010/main" xmlns="" w="9525">
                     <a:solidFill>
                       <a:srgbClr val="000000"/>
                     </a:solidFill>
@@ -11552,7 +11552,7 @@
               </a:ln>
               <a:extLst>
                 <a:ext uri="{91240B29-F687-4f45-9708-019B960494DF}">
-                  <a14:hiddenLine xmlns="" xmlns:a14="http://schemas.microsoft.com/office/drawing/2010/main" w="9525">
+                  <a14:hiddenLine xmlns:a14="http://schemas.microsoft.com/office/drawing/2010/main" xmlns="" w="9525">
                     <a:solidFill>
                       <a:srgbClr val="000000"/>
                     </a:solidFill>
@@ -11667,7 +11667,7 @@
               </a:ln>
               <a:extLst>
                 <a:ext uri="{91240B29-F687-4f45-9708-019B960494DF}">
-                  <a14:hiddenLine xmlns="" xmlns:a14="http://schemas.microsoft.com/office/drawing/2010/main" w="9525">
+                  <a14:hiddenLine xmlns:a14="http://schemas.microsoft.com/office/drawing/2010/main" xmlns="" w="9525">
                     <a:solidFill>
                       <a:srgbClr val="000000"/>
                     </a:solidFill>
@@ -11757,7 +11757,7 @@
               </a:ln>
               <a:extLst>
                 <a:ext uri="{91240B29-F687-4f45-9708-019B960494DF}">
-                  <a14:hiddenLine xmlns="" xmlns:a14="http://schemas.microsoft.com/office/drawing/2010/main" w="9525">
+                  <a14:hiddenLine xmlns:a14="http://schemas.microsoft.com/office/drawing/2010/main" xmlns="" w="9525">
                     <a:solidFill>
                       <a:srgbClr val="000000"/>
                     </a:solidFill>
@@ -11822,7 +11822,7 @@
               </a:ln>
               <a:extLst>
                 <a:ext uri="{91240B29-F687-4f45-9708-019B960494DF}">
-                  <a14:hiddenLine xmlns="" xmlns:a14="http://schemas.microsoft.com/office/drawing/2010/main" w="9525">
+                  <a14:hiddenLine xmlns:a14="http://schemas.microsoft.com/office/drawing/2010/main" xmlns="" w="9525">
                     <a:solidFill>
                       <a:srgbClr val="000000"/>
                     </a:solidFill>
@@ -11912,7 +11912,7 @@
               </a:ln>
               <a:extLst>
                 <a:ext uri="{91240B29-F687-4f45-9708-019B960494DF}">
-                  <a14:hiddenLine xmlns="" xmlns:a14="http://schemas.microsoft.com/office/drawing/2010/main" w="9525">
+                  <a14:hiddenLine xmlns:a14="http://schemas.microsoft.com/office/drawing/2010/main" xmlns="" w="9525">
                     <a:solidFill>
                       <a:srgbClr val="000000"/>
                     </a:solidFill>
@@ -11980,7 +11980,7 @@
               </a:ln>
               <a:extLst>
                 <a:ext uri="{91240B29-F687-4f45-9708-019B960494DF}">
-                  <a14:hiddenLine xmlns="" xmlns:a14="http://schemas.microsoft.com/office/drawing/2010/main" w="9525">
+                  <a14:hiddenLine xmlns:a14="http://schemas.microsoft.com/office/drawing/2010/main" xmlns="" w="9525">
                     <a:solidFill>
                       <a:srgbClr val="000000"/>
                     </a:solidFill>
@@ -12070,7 +12070,7 @@
               </a:ln>
               <a:extLst>
                 <a:ext uri="{91240B29-F687-4f45-9708-019B960494DF}">
-                  <a14:hiddenLine xmlns="" xmlns:a14="http://schemas.microsoft.com/office/drawing/2010/main" w="9525">
+                  <a14:hiddenLine xmlns:a14="http://schemas.microsoft.com/office/drawing/2010/main" xmlns="" w="9525">
                     <a:solidFill>
                       <a:srgbClr val="000000"/>
                     </a:solidFill>
@@ -12138,7 +12138,7 @@
               </a:ln>
               <a:extLst>
                 <a:ext uri="{91240B29-F687-4f45-9708-019B960494DF}">
-                  <a14:hiddenLine xmlns="" xmlns:a14="http://schemas.microsoft.com/office/drawing/2010/main" w="9525">
+                  <a14:hiddenLine xmlns:a14="http://schemas.microsoft.com/office/drawing/2010/main" xmlns="" w="9525">
                     <a:solidFill>
                       <a:srgbClr val="000000"/>
                     </a:solidFill>
@@ -12228,7 +12228,7 @@
               </a:ln>
               <a:extLst>
                 <a:ext uri="{91240B29-F687-4f45-9708-019B960494DF}">
-                  <a14:hiddenLine xmlns="" xmlns:a14="http://schemas.microsoft.com/office/drawing/2010/main" w="9525">
+                  <a14:hiddenLine xmlns:a14="http://schemas.microsoft.com/office/drawing/2010/main" xmlns="" w="9525">
                     <a:solidFill>
                       <a:srgbClr val="000000"/>
                     </a:solidFill>
@@ -12262,7 +12262,7 @@
               </a:ln>
               <a:extLst>
                 <a:ext uri="{91240B29-F687-4f45-9708-019B960494DF}">
-                  <a14:hiddenLine xmlns="" xmlns:a14="http://schemas.microsoft.com/office/drawing/2010/main" w="9525">
+                  <a14:hiddenLine xmlns:a14="http://schemas.microsoft.com/office/drawing/2010/main" xmlns="" w="9525">
                     <a:solidFill>
                       <a:srgbClr val="000000"/>
                     </a:solidFill>
@@ -12402,7 +12402,7 @@
           <a:p>
             <a:fld id="{7F39ED2F-F966-714C-AA81-E993DB6D6BBA}" type="datetime1">
               <a:rPr lang="en-US" smtClean="0"/>
-              <a:t>9/16/25</a:t>
+              <a:t>2/26/26</a:t>
             </a:fld>
             <a:endParaRPr lang="en-US"/>
           </a:p>
@@ -13500,8 +13500,8 @@
           </a:p>
         </p:txBody>
       </p:sp>
-      <mc:AlternateContent xmlns:mc="http://schemas.openxmlformats.org/markup-compatibility/2006">
-        <mc:Choice xmlns:a14="http://schemas.microsoft.com/office/drawing/2010/main" Requires="a14">
+      <mc:AlternateContent xmlns:mc="http://schemas.openxmlformats.org/markup-compatibility/2006" xmlns:a14="http://schemas.microsoft.com/office/drawing/2010/main">
+        <mc:Choice Requires="a14">
           <p:sp>
             <p:nvSpPr>
               <p:cNvPr id="2" name="TextBox 1">
@@ -13625,13 +13625,7 @@
                             <a:rPr lang="en-US" sz="2100" b="0" i="1" smtClean="0">
                               <a:latin typeface="Cambria Math" panose="02040503050406030204" pitchFamily="18" charset="0"/>
                             </a:rPr>
-                            <m:t>+</m:t>
-                          </m:r>
-                          <m:r>
-                            <a:rPr lang="en-US" sz="2100" b="0" i="1" smtClean="0">
-                              <a:latin typeface="Cambria Math" panose="02040503050406030204" pitchFamily="18" charset="0"/>
-                            </a:rPr>
-                            <m:t>2</m:t>
+                            <m:t>+2</m:t>
                           </m:r>
                           <m:r>
                             <a:rPr lang="en-US" sz="2100" i="1">
@@ -13719,7 +13713,7 @@
             </p:txBody>
           </p:sp>
         </mc:Choice>
-        <mc:Fallback>
+        <mc:Fallback xmlns="">
           <p:sp>
             <p:nvSpPr>
               <p:cNvPr id="2" name="TextBox 1">
@@ -16330,7 +16324,10 @@
             <a:r>
               <a:rPr lang="en-US" dirty="0">
                 <a:solidFill>
-                  <a:schemeClr val="accent2"/>
+                  <a:schemeClr val="accent2">
+                    <a:lumMod val="60000"/>
+                    <a:lumOff val="40000"/>
+                  </a:schemeClr>
                 </a:solidFill>
               </a:rPr>
               <a:t>Label1 = find(</a:t>
@@ -16338,7 +16335,10 @@
             <a:r>
               <a:rPr lang="en-US" dirty="0" err="1">
                 <a:solidFill>
-                  <a:schemeClr val="accent2"/>
+                  <a:schemeClr val="accent2">
+                    <a:lumMod val="60000"/>
+                    <a:lumOff val="40000"/>
+                  </a:schemeClr>
                 </a:solidFill>
               </a:rPr>
               <a:t>i</a:t>
@@ -16346,15 +16346,29 @@
             <a:r>
               <a:rPr lang="en-US" dirty="0">
                 <a:solidFill>
-                  <a:schemeClr val="accent2"/>
+                  <a:schemeClr val="accent2">
+                    <a:lumMod val="60000"/>
+                    <a:lumOff val="40000"/>
+                  </a:schemeClr>
                 </a:solidFill>
               </a:rPr>
-              <a:t>)   , </a:t>
+              <a:t>)   ,</a:t>
             </a:r>
             <a:r>
               <a:rPr lang="en-US" dirty="0">
                 <a:solidFill>
-                  <a:schemeClr val="accent5"/>
+                  <a:schemeClr val="accent2"/>
+                </a:solidFill>
+              </a:rPr>
+              <a:t> </a:t>
+            </a:r>
+            <a:r>
+              <a:rPr lang="en-US" dirty="0">
+                <a:solidFill>
+                  <a:schemeClr val="accent5">
+                    <a:lumMod val="60000"/>
+                    <a:lumOff val="40000"/>
+                  </a:schemeClr>
                 </a:solidFill>
               </a:rPr>
               <a:t>Label2 = find(j)</a:t>
@@ -16365,7 +16379,10 @@
             <a:r>
               <a:rPr lang="en-US" dirty="0">
                 <a:solidFill>
-                  <a:schemeClr val="accent2"/>
+                  <a:schemeClr val="accent2">
+                    <a:lumMod val="60000"/>
+                    <a:lumOff val="40000"/>
+                  </a:schemeClr>
                 </a:solidFill>
               </a:rPr>
               <a:t>a[Label1]</a:t>
@@ -16377,7 +16394,10 @@
             <a:r>
               <a:rPr lang="en-US" dirty="0">
                 <a:solidFill>
-                  <a:schemeClr val="accent5"/>
+                  <a:schemeClr val="accent5">
+                    <a:lumMod val="60000"/>
+                    <a:lumOff val="40000"/>
+                  </a:schemeClr>
                 </a:solidFill>
               </a:rPr>
               <a:t>Label2</a:t>
@@ -16389,7 +16409,10 @@
             <a:r>
               <a:rPr lang="en-US" dirty="0">
                 <a:solidFill>
-                  <a:schemeClr val="accent5"/>
+                  <a:schemeClr val="accent5">
+                    <a:lumMod val="60000"/>
+                    <a:lumOff val="40000"/>
+                  </a:schemeClr>
                 </a:solidFill>
               </a:rPr>
               <a:t>a[Label2]</a:t>
@@ -16401,7 +16424,10 @@
             <a:r>
               <a:rPr lang="en-US" dirty="0">
                 <a:solidFill>
-                  <a:schemeClr val="accent2"/>
+                  <a:schemeClr val="accent2">
+                    <a:lumMod val="60000"/>
+                    <a:lumOff val="40000"/>
+                  </a:schemeClr>
                 </a:solidFill>
               </a:rPr>
               <a:t>Label1</a:t>
@@ -17324,7 +17350,10 @@
               <a:r>
                 <a:rPr lang="en-US" dirty="0">
                   <a:solidFill>
-                    <a:schemeClr val="accent5"/>
+                    <a:schemeClr val="accent5">
+                      <a:lumMod val="60000"/>
+                      <a:lumOff val="40000"/>
+                    </a:schemeClr>
                   </a:solidFill>
                 </a:rPr>
                 <a:t>5</a:t>
@@ -17336,7 +17365,10 @@
               <a:r>
                 <a:rPr lang="en-US" dirty="0">
                   <a:solidFill>
-                    <a:schemeClr val="accent5"/>
+                    <a:schemeClr val="accent5">
+                      <a:lumMod val="60000"/>
+                      <a:lumOff val="40000"/>
+                    </a:schemeClr>
                   </a:solidFill>
                 </a:rPr>
                 <a:t>5</a:t>
@@ -26121,7 +26153,10 @@
             <a:noFill/>
             <a:ln>
               <a:solidFill>
-                <a:schemeClr val="accent2"/>
+                <a:schemeClr val="accent2">
+                  <a:lumMod val="60000"/>
+                  <a:lumOff val="40000"/>
+                </a:schemeClr>
               </a:solidFill>
             </a:ln>
           </p:spPr>
@@ -27702,7 +27737,10 @@
               <a:noFill/>
               <a:ln>
                 <a:solidFill>
-                  <a:schemeClr val="accent2"/>
+                  <a:schemeClr val="accent2">
+                    <a:lumMod val="60000"/>
+                    <a:lumOff val="40000"/>
+                  </a:schemeClr>
                 </a:solidFill>
               </a:ln>
             </p:spPr>
@@ -27752,7 +27790,10 @@
                 <a:avLst/>
               </a:prstGeom>
               <a:solidFill>
-                <a:schemeClr val="accent2"/>
+                <a:schemeClr val="accent2">
+                  <a:lumMod val="60000"/>
+                  <a:lumOff val="40000"/>
+                </a:schemeClr>
               </a:solidFill>
               <a:ln>
                 <a:solidFill>
@@ -27810,7 +27851,10 @@
                 <a:avLst/>
               </a:prstGeom>
               <a:solidFill>
-                <a:schemeClr val="accent2"/>
+                <a:schemeClr val="accent2">
+                  <a:lumMod val="60000"/>
+                  <a:lumOff val="40000"/>
+                </a:schemeClr>
               </a:solidFill>
               <a:ln>
                 <a:solidFill>
@@ -27868,7 +27912,10 @@
                 <a:avLst/>
               </a:prstGeom>
               <a:solidFill>
-                <a:schemeClr val="accent2"/>
+                <a:schemeClr val="accent2">
+                  <a:lumMod val="60000"/>
+                  <a:lumOff val="40000"/>
+                </a:schemeClr>
               </a:solidFill>
               <a:ln>
                 <a:solidFill>
@@ -27926,7 +27973,10 @@
                 <a:avLst/>
               </a:prstGeom>
               <a:solidFill>
-                <a:schemeClr val="accent2"/>
+                <a:schemeClr val="accent2">
+                  <a:lumMod val="60000"/>
+                  <a:lumOff val="40000"/>
+                </a:schemeClr>
               </a:solidFill>
               <a:ln>
                 <a:solidFill>
@@ -27984,7 +28034,10 @@
                 <a:avLst/>
               </a:prstGeom>
               <a:solidFill>
-                <a:schemeClr val="accent2"/>
+                <a:schemeClr val="accent2">
+                  <a:lumMod val="60000"/>
+                  <a:lumOff val="40000"/>
+                </a:schemeClr>
               </a:solidFill>
               <a:ln>
                 <a:solidFill>
@@ -28045,7 +28098,14 @@
               <a:prstGeom prst="line">
                 <a:avLst/>
               </a:prstGeom>
-              <a:ln w="22225"/>
+              <a:ln w="22225">
+                <a:solidFill>
+                  <a:schemeClr val="accent2">
+                    <a:lumMod val="60000"/>
+                    <a:lumOff val="40000"/>
+                  </a:schemeClr>
+                </a:solidFill>
+              </a:ln>
             </p:spPr>
             <p:style>
               <a:lnRef idx="1">
@@ -28086,7 +28146,14 @@
               <a:prstGeom prst="line">
                 <a:avLst/>
               </a:prstGeom>
-              <a:ln w="22225"/>
+              <a:ln w="22225">
+                <a:solidFill>
+                  <a:schemeClr val="accent2">
+                    <a:lumMod val="60000"/>
+                    <a:lumOff val="40000"/>
+                  </a:schemeClr>
+                </a:solidFill>
+              </a:ln>
             </p:spPr>
             <p:style>
               <a:lnRef idx="1">
@@ -28165,7 +28232,10 @@
                 <a:avLst/>
               </a:prstGeom>
               <a:solidFill>
-                <a:schemeClr val="accent2"/>
+                <a:schemeClr val="accent2">
+                  <a:lumMod val="60000"/>
+                  <a:lumOff val="40000"/>
+                </a:schemeClr>
               </a:solidFill>
               <a:ln>
                 <a:solidFill>
@@ -29734,7 +29804,10 @@
               <a:noFill/>
               <a:ln>
                 <a:solidFill>
-                  <a:schemeClr val="accent2"/>
+                  <a:schemeClr val="accent2">
+                    <a:lumMod val="60000"/>
+                    <a:lumOff val="40000"/>
+                  </a:schemeClr>
                 </a:solidFill>
               </a:ln>
             </p:spPr>
@@ -31295,7 +31368,10 @@
               <a:noFill/>
               <a:ln>
                 <a:solidFill>
-                  <a:schemeClr val="accent2"/>
+                  <a:schemeClr val="accent2">
+                    <a:lumMod val="60000"/>
+                    <a:lumOff val="40000"/>
+                  </a:schemeClr>
                 </a:solidFill>
               </a:ln>
             </p:spPr>
@@ -31345,7 +31421,10 @@
                 <a:avLst/>
               </a:prstGeom>
               <a:solidFill>
-                <a:schemeClr val="accent2"/>
+                <a:schemeClr val="accent2">
+                  <a:lumMod val="60000"/>
+                  <a:lumOff val="40000"/>
+                </a:schemeClr>
               </a:solidFill>
               <a:ln>
                 <a:solidFill>
@@ -31406,7 +31485,14 @@
               <a:prstGeom prst="line">
                 <a:avLst/>
               </a:prstGeom>
-              <a:ln w="22225"/>
+              <a:ln w="22225">
+                <a:solidFill>
+                  <a:schemeClr val="accent3">
+                    <a:lumMod val="60000"/>
+                    <a:lumOff val="40000"/>
+                  </a:schemeClr>
+                </a:solidFill>
+              </a:ln>
             </p:spPr>
             <p:style>
               <a:lnRef idx="1">
@@ -31447,7 +31533,14 @@
               <a:prstGeom prst="line">
                 <a:avLst/>
               </a:prstGeom>
-              <a:ln w="22225"/>
+              <a:ln w="22225">
+                <a:solidFill>
+                  <a:schemeClr val="accent3">
+                    <a:lumMod val="60000"/>
+                    <a:lumOff val="40000"/>
+                  </a:schemeClr>
+                </a:solidFill>
+              </a:ln>
             </p:spPr>
             <p:style>
               <a:lnRef idx="1">
@@ -31488,7 +31581,14 @@
               <a:prstGeom prst="line">
                 <a:avLst/>
               </a:prstGeom>
-              <a:ln w="22225"/>
+              <a:ln w="22225">
+                <a:solidFill>
+                  <a:schemeClr val="accent3">
+                    <a:lumMod val="60000"/>
+                    <a:lumOff val="40000"/>
+                  </a:schemeClr>
+                </a:solidFill>
+              </a:ln>
             </p:spPr>
             <p:style>
               <a:lnRef idx="1">
@@ -31529,7 +31629,14 @@
               <a:prstGeom prst="line">
                 <a:avLst/>
               </a:prstGeom>
-              <a:ln w="22225"/>
+              <a:ln w="22225">
+                <a:solidFill>
+                  <a:schemeClr val="accent3">
+                    <a:lumMod val="60000"/>
+                    <a:lumOff val="40000"/>
+                  </a:schemeClr>
+                </a:solidFill>
+              </a:ln>
             </p:spPr>
             <p:style>
               <a:lnRef idx="1">
@@ -31570,7 +31677,14 @@
               <a:prstGeom prst="line">
                 <a:avLst/>
               </a:prstGeom>
-              <a:ln w="22225"/>
+              <a:ln w="22225">
+                <a:solidFill>
+                  <a:schemeClr val="accent3">
+                    <a:lumMod val="60000"/>
+                    <a:lumOff val="40000"/>
+                  </a:schemeClr>
+                </a:solidFill>
+              </a:ln>
             </p:spPr>
             <p:style>
               <a:lnRef idx="1">
@@ -31611,7 +31725,14 @@
               <a:prstGeom prst="line">
                 <a:avLst/>
               </a:prstGeom>
-              <a:ln w="22225"/>
+              <a:ln w="22225">
+                <a:solidFill>
+                  <a:schemeClr val="accent4">
+                    <a:lumMod val="60000"/>
+                    <a:lumOff val="40000"/>
+                  </a:schemeClr>
+                </a:solidFill>
+              </a:ln>
             </p:spPr>
             <p:style>
               <a:lnRef idx="1">
@@ -31665,7 +31786,10 @@
             <a:r>
               <a:rPr lang="en-US" dirty="0">
                 <a:solidFill>
-                  <a:schemeClr val="accent2"/>
+                  <a:schemeClr val="accent2">
+                    <a:lumMod val="60000"/>
+                    <a:lumOff val="40000"/>
+                  </a:schemeClr>
                 </a:solidFill>
               </a:rPr>
               <a:t>a forest (made up of individual trees)</a:t>
@@ -31708,7 +31832,10 @@
             <a:r>
               <a:rPr lang="en-US" dirty="0">
                 <a:solidFill>
-                  <a:schemeClr val="accent3"/>
+                  <a:schemeClr val="accent3">
+                    <a:lumMod val="60000"/>
+                    <a:lumOff val="40000"/>
+                  </a:schemeClr>
                 </a:solidFill>
               </a:rPr>
               <a:t>candidate edges</a:t>
@@ -31760,7 +31887,10 @@
             <a:r>
               <a:rPr lang="en-US" dirty="0">
                 <a:solidFill>
-                  <a:schemeClr val="accent4"/>
+                  <a:schemeClr val="accent4">
+                    <a:lumMod val="60000"/>
+                    <a:lumOff val="40000"/>
+                  </a:schemeClr>
                 </a:solidFill>
               </a:rPr>
               <a:t>NOT a candidate edge</a:t>
@@ -31849,8 +31979,8 @@
             <a:chExt cx="3699473" cy="3084115"/>
           </a:xfrm>
         </p:grpSpPr>
-        <mc:AlternateContent xmlns:mc="http://schemas.openxmlformats.org/markup-compatibility/2006" xmlns:a14="http://schemas.microsoft.com/office/drawing/2010/main">
-          <mc:Choice Requires="a14">
+        <mc:AlternateContent xmlns:mc="http://schemas.openxmlformats.org/markup-compatibility/2006">
+          <mc:Choice xmlns:a14="http://schemas.microsoft.com/office/drawing/2010/main" Requires="a14">
             <p:sp>
               <p:nvSpPr>
                 <p:cNvPr id="3" name="Oval 2">
@@ -31871,6 +32001,12 @@
                 <a:prstGeom prst="ellipse">
                   <a:avLst/>
                 </a:prstGeom>
+                <a:solidFill>
+                  <a:schemeClr val="accent1">
+                    <a:lumMod val="60000"/>
+                    <a:lumOff val="40000"/>
+                  </a:schemeClr>
+                </a:solidFill>
                 <a:ln>
                   <a:solidFill>
                     <a:schemeClr val="bg1"/>
@@ -31908,6 +32044,9 @@
                           <m:sSubPr>
                             <m:ctrlPr>
                               <a:rPr lang="en-US" b="0" i="1" smtClean="0">
+                                <a:solidFill>
+                                  <a:schemeClr val="bg1"/>
+                                </a:solidFill>
                                 <a:latin typeface="Cambria Math" panose="02040503050406030204" pitchFamily="18" charset="0"/>
                               </a:rPr>
                             </m:ctrlPr>
@@ -31915,6 +32054,9 @@
                           <m:e>
                             <m:r>
                               <a:rPr lang="en-US" b="0" i="1" smtClean="0">
+                                <a:solidFill>
+                                  <a:schemeClr val="bg1"/>
+                                </a:solidFill>
                                 <a:latin typeface="Cambria Math" panose="02040503050406030204" pitchFamily="18" charset="0"/>
                               </a:rPr>
                               <m:t>𝑣</m:t>
@@ -31923,6 +32065,9 @@
                           <m:sub>
                             <m:r>
                               <a:rPr lang="en-US" b="0" i="1" smtClean="0">
+                                <a:solidFill>
+                                  <a:schemeClr val="bg1"/>
+                                </a:solidFill>
                                 <a:latin typeface="Cambria Math" panose="02040503050406030204" pitchFamily="18" charset="0"/>
                               </a:rPr>
                               <m:t>0</m:t>
@@ -31932,18 +32077,22 @@
                       </m:oMath>
                     </m:oMathPara>
                   </a14:m>
-                  <a:endParaRPr lang="en-US" dirty="0"/>
+                  <a:endParaRPr lang="en-US" dirty="0">
+                    <a:solidFill>
+                      <a:schemeClr val="bg1"/>
+                    </a:solidFill>
+                  </a:endParaRPr>
                 </a:p>
               </p:txBody>
             </p:sp>
           </mc:Choice>
-          <mc:Fallback xmlns="">
+          <mc:Fallback>
             <p:sp>
               <p:nvSpPr>
                 <p:cNvPr id="3" name="Oval 2">
                   <a:extLst>
                     <a:ext uri="{FF2B5EF4-FFF2-40B4-BE49-F238E27FC236}">
-                      <a16:creationId xmlns:a16="http://schemas.microsoft.com/office/drawing/2014/main" id="{12384C0A-02AA-85CD-4C2F-F3EC1E1E1B6F}"/>
+                      <a16:creationId xmlns:a16="http://schemas.microsoft.com/office/drawing/2014/main" id="{1F1029E1-7F12-70EB-0D86-4AA724F7B366}"/>
                     </a:ext>
                   </a:extLst>
                 </p:cNvPr>
@@ -31987,8 +32136,8 @@
             </p:sp>
           </mc:Fallback>
         </mc:AlternateContent>
-        <mc:AlternateContent xmlns:mc="http://schemas.openxmlformats.org/markup-compatibility/2006" xmlns:a14="http://schemas.microsoft.com/office/drawing/2010/main">
-          <mc:Choice Requires="a14">
+        <mc:AlternateContent xmlns:mc="http://schemas.openxmlformats.org/markup-compatibility/2006">
+          <mc:Choice xmlns:a14="http://schemas.microsoft.com/office/drawing/2010/main" Requires="a14">
             <p:sp>
               <p:nvSpPr>
                 <p:cNvPr id="4" name="Oval 3">
@@ -32009,6 +32158,12 @@
                 <a:prstGeom prst="ellipse">
                   <a:avLst/>
                 </a:prstGeom>
+                <a:solidFill>
+                  <a:schemeClr val="accent1">
+                    <a:lumMod val="60000"/>
+                    <a:lumOff val="40000"/>
+                  </a:schemeClr>
+                </a:solidFill>
                 <a:ln>
                   <a:solidFill>
                     <a:schemeClr val="bg1"/>
@@ -32046,6 +32201,9 @@
                           <m:sSubPr>
                             <m:ctrlPr>
                               <a:rPr lang="en-US" b="0" i="1" smtClean="0">
+                                <a:solidFill>
+                                  <a:schemeClr val="bg1"/>
+                                </a:solidFill>
                                 <a:latin typeface="Cambria Math" panose="02040503050406030204" pitchFamily="18" charset="0"/>
                               </a:rPr>
                             </m:ctrlPr>
@@ -32053,6 +32211,9 @@
                           <m:e>
                             <m:r>
                               <a:rPr lang="en-US" b="0" i="1" smtClean="0">
+                                <a:solidFill>
+                                  <a:schemeClr val="bg1"/>
+                                </a:solidFill>
                                 <a:latin typeface="Cambria Math" panose="02040503050406030204" pitchFamily="18" charset="0"/>
                               </a:rPr>
                               <m:t>𝑣</m:t>
@@ -32061,6 +32222,9 @@
                           <m:sub>
                             <m:r>
                               <a:rPr lang="en-US" b="0" i="1" smtClean="0">
+                                <a:solidFill>
+                                  <a:schemeClr val="bg1"/>
+                                </a:solidFill>
                                 <a:latin typeface="Cambria Math" panose="02040503050406030204" pitchFamily="18" charset="0"/>
                               </a:rPr>
                               <m:t>2</m:t>
@@ -32070,18 +32234,22 @@
                       </m:oMath>
                     </m:oMathPara>
                   </a14:m>
-                  <a:endParaRPr lang="en-US" dirty="0"/>
+                  <a:endParaRPr lang="en-US" dirty="0">
+                    <a:solidFill>
+                      <a:schemeClr val="bg1"/>
+                    </a:solidFill>
+                  </a:endParaRPr>
                 </a:p>
               </p:txBody>
             </p:sp>
           </mc:Choice>
-          <mc:Fallback xmlns="">
+          <mc:Fallback>
             <p:sp>
               <p:nvSpPr>
                 <p:cNvPr id="4" name="Oval 3">
                   <a:extLst>
                     <a:ext uri="{FF2B5EF4-FFF2-40B4-BE49-F238E27FC236}">
-                      <a16:creationId xmlns:a16="http://schemas.microsoft.com/office/drawing/2014/main" id="{5C034221-88ED-7711-F1F9-08ECCE7212D2}"/>
+                      <a16:creationId xmlns:a16="http://schemas.microsoft.com/office/drawing/2014/main" id="{B0658832-13EC-8B80-7030-75B3AE773A99}"/>
                     </a:ext>
                   </a:extLst>
                 </p:cNvPr>
@@ -32125,8 +32293,8 @@
             </p:sp>
           </mc:Fallback>
         </mc:AlternateContent>
-        <mc:AlternateContent xmlns:mc="http://schemas.openxmlformats.org/markup-compatibility/2006" xmlns:a14="http://schemas.microsoft.com/office/drawing/2010/main">
-          <mc:Choice Requires="a14">
+        <mc:AlternateContent xmlns:mc="http://schemas.openxmlformats.org/markup-compatibility/2006">
+          <mc:Choice xmlns:a14="http://schemas.microsoft.com/office/drawing/2010/main" Requires="a14">
             <p:sp>
               <p:nvSpPr>
                 <p:cNvPr id="5" name="Oval 4">
@@ -32147,6 +32315,12 @@
                 <a:prstGeom prst="ellipse">
                   <a:avLst/>
                 </a:prstGeom>
+                <a:solidFill>
+                  <a:schemeClr val="accent1">
+                    <a:lumMod val="60000"/>
+                    <a:lumOff val="40000"/>
+                  </a:schemeClr>
+                </a:solidFill>
                 <a:ln>
                   <a:solidFill>
                     <a:schemeClr val="bg1"/>
@@ -32184,6 +32358,9 @@
                           <m:sSubPr>
                             <m:ctrlPr>
                               <a:rPr lang="en-US" b="0" i="1" smtClean="0">
+                                <a:solidFill>
+                                  <a:schemeClr val="bg1"/>
+                                </a:solidFill>
                                 <a:latin typeface="Cambria Math" panose="02040503050406030204" pitchFamily="18" charset="0"/>
                               </a:rPr>
                             </m:ctrlPr>
@@ -32191,6 +32368,9 @@
                           <m:e>
                             <m:r>
                               <a:rPr lang="en-US" b="0" i="1" smtClean="0">
+                                <a:solidFill>
+                                  <a:schemeClr val="bg1"/>
+                                </a:solidFill>
                                 <a:latin typeface="Cambria Math" panose="02040503050406030204" pitchFamily="18" charset="0"/>
                               </a:rPr>
                               <m:t>𝑣</m:t>
@@ -32199,6 +32379,9 @@
                           <m:sub>
                             <m:r>
                               <a:rPr lang="en-US" b="0" i="1" smtClean="0">
+                                <a:solidFill>
+                                  <a:schemeClr val="bg1"/>
+                                </a:solidFill>
                                 <a:latin typeface="Cambria Math" panose="02040503050406030204" pitchFamily="18" charset="0"/>
                               </a:rPr>
                               <m:t>3</m:t>
@@ -32208,18 +32391,22 @@
                       </m:oMath>
                     </m:oMathPara>
                   </a14:m>
-                  <a:endParaRPr lang="en-US" dirty="0"/>
+                  <a:endParaRPr lang="en-US" dirty="0">
+                    <a:solidFill>
+                      <a:schemeClr val="bg1"/>
+                    </a:solidFill>
+                  </a:endParaRPr>
                 </a:p>
               </p:txBody>
             </p:sp>
           </mc:Choice>
-          <mc:Fallback xmlns="">
+          <mc:Fallback>
             <p:sp>
               <p:nvSpPr>
                 <p:cNvPr id="5" name="Oval 4">
                   <a:extLst>
                     <a:ext uri="{FF2B5EF4-FFF2-40B4-BE49-F238E27FC236}">
-                      <a16:creationId xmlns:a16="http://schemas.microsoft.com/office/drawing/2014/main" id="{97D2483A-DEF3-EC26-87D4-DD4F1DE828AA}"/>
+                      <a16:creationId xmlns:a16="http://schemas.microsoft.com/office/drawing/2014/main" id="{44D6F8DF-C15F-164D-EC70-9EB1EEF1F50C}"/>
                     </a:ext>
                   </a:extLst>
                 </p:cNvPr>
@@ -32263,8 +32450,8 @@
             </p:sp>
           </mc:Fallback>
         </mc:AlternateContent>
-        <mc:AlternateContent xmlns:mc="http://schemas.openxmlformats.org/markup-compatibility/2006" xmlns:a14="http://schemas.microsoft.com/office/drawing/2010/main">
-          <mc:Choice Requires="a14">
+        <mc:AlternateContent xmlns:mc="http://schemas.openxmlformats.org/markup-compatibility/2006">
+          <mc:Choice xmlns:a14="http://schemas.microsoft.com/office/drawing/2010/main" Requires="a14">
             <p:sp>
               <p:nvSpPr>
                 <p:cNvPr id="6" name="Oval 5">
@@ -32285,6 +32472,12 @@
                 <a:prstGeom prst="ellipse">
                   <a:avLst/>
                 </a:prstGeom>
+                <a:solidFill>
+                  <a:schemeClr val="accent1">
+                    <a:lumMod val="60000"/>
+                    <a:lumOff val="40000"/>
+                  </a:schemeClr>
+                </a:solidFill>
                 <a:ln>
                   <a:solidFill>
                     <a:schemeClr val="bg1"/>
@@ -32322,6 +32515,9 @@
                           <m:sSubPr>
                             <m:ctrlPr>
                               <a:rPr lang="en-US" b="0" i="1" smtClean="0">
+                                <a:solidFill>
+                                  <a:schemeClr val="bg1"/>
+                                </a:solidFill>
                                 <a:latin typeface="Cambria Math" panose="02040503050406030204" pitchFamily="18" charset="0"/>
                               </a:rPr>
                             </m:ctrlPr>
@@ -32329,6 +32525,9 @@
                           <m:e>
                             <m:r>
                               <a:rPr lang="en-US" b="0" i="1" smtClean="0">
+                                <a:solidFill>
+                                  <a:schemeClr val="bg1"/>
+                                </a:solidFill>
                                 <a:latin typeface="Cambria Math" panose="02040503050406030204" pitchFamily="18" charset="0"/>
                               </a:rPr>
                               <m:t>𝑣</m:t>
@@ -32337,6 +32536,9 @@
                           <m:sub>
                             <m:r>
                               <a:rPr lang="en-US" b="0" i="1" smtClean="0">
+                                <a:solidFill>
+                                  <a:schemeClr val="bg1"/>
+                                </a:solidFill>
                                 <a:latin typeface="Cambria Math" panose="02040503050406030204" pitchFamily="18" charset="0"/>
                               </a:rPr>
                               <m:t>1</m:t>
@@ -32346,18 +32548,22 @@
                       </m:oMath>
                     </m:oMathPara>
                   </a14:m>
-                  <a:endParaRPr lang="en-US" dirty="0"/>
+                  <a:endParaRPr lang="en-US" dirty="0">
+                    <a:solidFill>
+                      <a:schemeClr val="bg1"/>
+                    </a:solidFill>
+                  </a:endParaRPr>
                 </a:p>
               </p:txBody>
             </p:sp>
           </mc:Choice>
-          <mc:Fallback xmlns="">
+          <mc:Fallback>
             <p:sp>
               <p:nvSpPr>
                 <p:cNvPr id="6" name="Oval 5">
                   <a:extLst>
                     <a:ext uri="{FF2B5EF4-FFF2-40B4-BE49-F238E27FC236}">
-                      <a16:creationId xmlns:a16="http://schemas.microsoft.com/office/drawing/2014/main" id="{2C57AE43-EB56-8B6B-124F-E2652D6DCB5F}"/>
+                      <a16:creationId xmlns:a16="http://schemas.microsoft.com/office/drawing/2014/main" id="{407F8F1D-088D-FF1C-7ECB-52E4F007450A}"/>
                     </a:ext>
                   </a:extLst>
                 </p:cNvPr>
@@ -32401,8 +32607,8 @@
             </p:sp>
           </mc:Fallback>
         </mc:AlternateContent>
-        <mc:AlternateContent xmlns:mc="http://schemas.openxmlformats.org/markup-compatibility/2006" xmlns:a14="http://schemas.microsoft.com/office/drawing/2010/main">
-          <mc:Choice Requires="a14">
+        <mc:AlternateContent xmlns:mc="http://schemas.openxmlformats.org/markup-compatibility/2006">
+          <mc:Choice xmlns:a14="http://schemas.microsoft.com/office/drawing/2010/main" Requires="a14">
             <p:sp>
               <p:nvSpPr>
                 <p:cNvPr id="7" name="Oval 6">
@@ -32423,6 +32629,12 @@
                 <a:prstGeom prst="ellipse">
                   <a:avLst/>
                 </a:prstGeom>
+                <a:solidFill>
+                  <a:schemeClr val="accent1">
+                    <a:lumMod val="60000"/>
+                    <a:lumOff val="40000"/>
+                  </a:schemeClr>
+                </a:solidFill>
                 <a:ln>
                   <a:solidFill>
                     <a:schemeClr val="bg1"/>
@@ -32460,6 +32672,9 @@
                           <m:sSubPr>
                             <m:ctrlPr>
                               <a:rPr lang="en-US" b="0" i="1" smtClean="0">
+                                <a:solidFill>
+                                  <a:schemeClr val="bg1"/>
+                                </a:solidFill>
                                 <a:latin typeface="Cambria Math" panose="02040503050406030204" pitchFamily="18" charset="0"/>
                               </a:rPr>
                             </m:ctrlPr>
@@ -32467,6 +32682,9 @@
                           <m:e>
                             <m:r>
                               <a:rPr lang="en-US" b="0" i="1" smtClean="0">
+                                <a:solidFill>
+                                  <a:schemeClr val="bg1"/>
+                                </a:solidFill>
                                 <a:latin typeface="Cambria Math" panose="02040503050406030204" pitchFamily="18" charset="0"/>
                               </a:rPr>
                               <m:t>𝑣</m:t>
@@ -32475,6 +32693,9 @@
                           <m:sub>
                             <m:r>
                               <a:rPr lang="en-US" b="0" i="1" smtClean="0">
+                                <a:solidFill>
+                                  <a:schemeClr val="bg1"/>
+                                </a:solidFill>
                                 <a:latin typeface="Cambria Math" panose="02040503050406030204" pitchFamily="18" charset="0"/>
                               </a:rPr>
                               <m:t>4</m:t>
@@ -32484,18 +32705,22 @@
                       </m:oMath>
                     </m:oMathPara>
                   </a14:m>
-                  <a:endParaRPr lang="en-US" dirty="0"/>
+                  <a:endParaRPr lang="en-US" dirty="0">
+                    <a:solidFill>
+                      <a:schemeClr val="bg1"/>
+                    </a:solidFill>
+                  </a:endParaRPr>
                 </a:p>
               </p:txBody>
             </p:sp>
           </mc:Choice>
-          <mc:Fallback xmlns="">
+          <mc:Fallback>
             <p:sp>
               <p:nvSpPr>
                 <p:cNvPr id="7" name="Oval 6">
                   <a:extLst>
                     <a:ext uri="{FF2B5EF4-FFF2-40B4-BE49-F238E27FC236}">
-                      <a16:creationId xmlns:a16="http://schemas.microsoft.com/office/drawing/2014/main" id="{FDEBB904-F62B-2280-283F-58BD0E68D10B}"/>
+                      <a16:creationId xmlns:a16="http://schemas.microsoft.com/office/drawing/2014/main" id="{A6FE05BD-5964-FFF3-A565-6D4C2FE74A60}"/>
                     </a:ext>
                   </a:extLst>
                 </p:cNvPr>
@@ -32539,8 +32764,8 @@
             </p:sp>
           </mc:Fallback>
         </mc:AlternateContent>
-        <mc:AlternateContent xmlns:mc="http://schemas.openxmlformats.org/markup-compatibility/2006" xmlns:a14="http://schemas.microsoft.com/office/drawing/2010/main">
-          <mc:Choice Requires="a14">
+        <mc:AlternateContent xmlns:mc="http://schemas.openxmlformats.org/markup-compatibility/2006">
+          <mc:Choice xmlns:a14="http://schemas.microsoft.com/office/drawing/2010/main" Requires="a14">
             <p:sp>
               <p:nvSpPr>
                 <p:cNvPr id="8" name="Oval 7">
@@ -32561,6 +32786,12 @@
                 <a:prstGeom prst="ellipse">
                   <a:avLst/>
                 </a:prstGeom>
+                <a:solidFill>
+                  <a:schemeClr val="accent1">
+                    <a:lumMod val="60000"/>
+                    <a:lumOff val="40000"/>
+                  </a:schemeClr>
+                </a:solidFill>
                 <a:ln>
                   <a:solidFill>
                     <a:schemeClr val="bg1"/>
@@ -32598,6 +32829,9 @@
                           <m:sSubPr>
                             <m:ctrlPr>
                               <a:rPr lang="en-US" b="0" i="1" smtClean="0">
+                                <a:solidFill>
+                                  <a:schemeClr val="bg1"/>
+                                </a:solidFill>
                                 <a:latin typeface="Cambria Math" panose="02040503050406030204" pitchFamily="18" charset="0"/>
                               </a:rPr>
                             </m:ctrlPr>
@@ -32605,6 +32839,9 @@
                           <m:e>
                             <m:r>
                               <a:rPr lang="en-US" b="0" i="1" smtClean="0">
+                                <a:solidFill>
+                                  <a:schemeClr val="bg1"/>
+                                </a:solidFill>
                                 <a:latin typeface="Cambria Math" panose="02040503050406030204" pitchFamily="18" charset="0"/>
                               </a:rPr>
                               <m:t>𝑣</m:t>
@@ -32613,6 +32850,9 @@
                           <m:sub>
                             <m:r>
                               <a:rPr lang="en-US" b="0" i="1" smtClean="0">
+                                <a:solidFill>
+                                  <a:schemeClr val="bg1"/>
+                                </a:solidFill>
                                 <a:latin typeface="Cambria Math" panose="02040503050406030204" pitchFamily="18" charset="0"/>
                               </a:rPr>
                               <m:t>5</m:t>
@@ -32622,18 +32862,22 @@
                       </m:oMath>
                     </m:oMathPara>
                   </a14:m>
-                  <a:endParaRPr lang="en-US" dirty="0"/>
+                  <a:endParaRPr lang="en-US" dirty="0">
+                    <a:solidFill>
+                      <a:schemeClr val="bg1"/>
+                    </a:solidFill>
+                  </a:endParaRPr>
                 </a:p>
               </p:txBody>
             </p:sp>
           </mc:Choice>
-          <mc:Fallback xmlns="">
+          <mc:Fallback>
             <p:sp>
               <p:nvSpPr>
                 <p:cNvPr id="8" name="Oval 7">
                   <a:extLst>
                     <a:ext uri="{FF2B5EF4-FFF2-40B4-BE49-F238E27FC236}">
-                      <a16:creationId xmlns:a16="http://schemas.microsoft.com/office/drawing/2014/main" id="{30C5D336-505C-0913-37C2-5423664D30AF}"/>
+                      <a16:creationId xmlns:a16="http://schemas.microsoft.com/office/drawing/2014/main" id="{DF2A9EDA-95D6-22B3-E9F0-82BA9D3C499B}"/>
                     </a:ext>
                   </a:extLst>
                 </p:cNvPr>
@@ -32677,8 +32921,8 @@
             </p:sp>
           </mc:Fallback>
         </mc:AlternateContent>
-        <mc:AlternateContent xmlns:mc="http://schemas.openxmlformats.org/markup-compatibility/2006" xmlns:a14="http://schemas.microsoft.com/office/drawing/2010/main">
-          <mc:Choice Requires="a14">
+        <mc:AlternateContent xmlns:mc="http://schemas.openxmlformats.org/markup-compatibility/2006">
+          <mc:Choice xmlns:a14="http://schemas.microsoft.com/office/drawing/2010/main" Requires="a14">
             <p:sp>
               <p:nvSpPr>
                 <p:cNvPr id="9" name="Oval 8">
@@ -32699,6 +32943,12 @@
                 <a:prstGeom prst="ellipse">
                   <a:avLst/>
                 </a:prstGeom>
+                <a:solidFill>
+                  <a:schemeClr val="accent1">
+                    <a:lumMod val="60000"/>
+                    <a:lumOff val="40000"/>
+                  </a:schemeClr>
+                </a:solidFill>
                 <a:ln>
                   <a:solidFill>
                     <a:schemeClr val="bg1"/>
@@ -32736,6 +32986,9 @@
                           <m:sSubPr>
                             <m:ctrlPr>
                               <a:rPr lang="en-US" b="0" i="1" smtClean="0">
+                                <a:solidFill>
+                                  <a:schemeClr val="bg1"/>
+                                </a:solidFill>
                                 <a:latin typeface="Cambria Math" panose="02040503050406030204" pitchFamily="18" charset="0"/>
                               </a:rPr>
                             </m:ctrlPr>
@@ -32743,6 +32996,9 @@
                           <m:e>
                             <m:r>
                               <a:rPr lang="en-US" b="0" i="1" smtClean="0">
+                                <a:solidFill>
+                                  <a:schemeClr val="bg1"/>
+                                </a:solidFill>
                                 <a:latin typeface="Cambria Math" panose="02040503050406030204" pitchFamily="18" charset="0"/>
                               </a:rPr>
                               <m:t>𝑣</m:t>
@@ -32751,6 +33007,9 @@
                           <m:sub>
                             <m:r>
                               <a:rPr lang="en-US" b="0" i="1" smtClean="0">
+                                <a:solidFill>
+                                  <a:schemeClr val="bg1"/>
+                                </a:solidFill>
                                 <a:latin typeface="Cambria Math" panose="02040503050406030204" pitchFamily="18" charset="0"/>
                               </a:rPr>
                               <m:t>6</m:t>
@@ -32760,18 +33019,22 @@
                       </m:oMath>
                     </m:oMathPara>
                   </a14:m>
-                  <a:endParaRPr lang="en-US" dirty="0"/>
+                  <a:endParaRPr lang="en-US" dirty="0">
+                    <a:solidFill>
+                      <a:schemeClr val="bg1"/>
+                    </a:solidFill>
+                  </a:endParaRPr>
                 </a:p>
               </p:txBody>
             </p:sp>
           </mc:Choice>
-          <mc:Fallback xmlns="">
+          <mc:Fallback>
             <p:sp>
               <p:nvSpPr>
                 <p:cNvPr id="9" name="Oval 8">
                   <a:extLst>
                     <a:ext uri="{FF2B5EF4-FFF2-40B4-BE49-F238E27FC236}">
-                      <a16:creationId xmlns:a16="http://schemas.microsoft.com/office/drawing/2014/main" id="{A317D9D8-0DF1-ECD8-A278-E84709FB1841}"/>
+                      <a16:creationId xmlns:a16="http://schemas.microsoft.com/office/drawing/2014/main" id="{EC975440-BE68-59AA-E24C-C907801FB0E9}"/>
                     </a:ext>
                   </a:extLst>
                 </p:cNvPr>
@@ -33402,7 +33665,14 @@
             <a:prstGeom prst="line">
               <a:avLst/>
             </a:prstGeom>
-            <a:ln w="19050"/>
+            <a:ln w="19050">
+              <a:solidFill>
+                <a:schemeClr val="accent1">
+                  <a:lumMod val="60000"/>
+                  <a:lumOff val="40000"/>
+                </a:schemeClr>
+              </a:solidFill>
+            </a:ln>
           </p:spPr>
           <p:style>
             <a:lnRef idx="1">
@@ -33443,7 +33713,14 @@
             <a:prstGeom prst="line">
               <a:avLst/>
             </a:prstGeom>
-            <a:ln w="19050"/>
+            <a:ln w="19050">
+              <a:solidFill>
+                <a:schemeClr val="accent1">
+                  <a:lumMod val="60000"/>
+                  <a:lumOff val="40000"/>
+                </a:schemeClr>
+              </a:solidFill>
+            </a:ln>
           </p:spPr>
           <p:style>
             <a:lnRef idx="1">
@@ -33484,7 +33761,14 @@
             <a:prstGeom prst="line">
               <a:avLst/>
             </a:prstGeom>
-            <a:ln w="19050"/>
+            <a:ln w="19050">
+              <a:solidFill>
+                <a:schemeClr val="accent1">
+                  <a:lumMod val="60000"/>
+                  <a:lumOff val="40000"/>
+                </a:schemeClr>
+              </a:solidFill>
+            </a:ln>
           </p:spPr>
           <p:style>
             <a:lnRef idx="1">
@@ -33525,7 +33809,14 @@
             <a:prstGeom prst="line">
               <a:avLst/>
             </a:prstGeom>
-            <a:ln w="19050"/>
+            <a:ln w="19050">
+              <a:solidFill>
+                <a:schemeClr val="accent1">
+                  <a:lumMod val="60000"/>
+                  <a:lumOff val="40000"/>
+                </a:schemeClr>
+              </a:solidFill>
+            </a:ln>
           </p:spPr>
           <p:style>
             <a:lnRef idx="1">
@@ -33566,7 +33857,14 @@
             <a:prstGeom prst="line">
               <a:avLst/>
             </a:prstGeom>
-            <a:ln w="19050"/>
+            <a:ln w="19050">
+              <a:solidFill>
+                <a:schemeClr val="accent1">
+                  <a:lumMod val="60000"/>
+                  <a:lumOff val="40000"/>
+                </a:schemeClr>
+              </a:solidFill>
+            </a:ln>
           </p:spPr>
           <p:style>
             <a:lnRef idx="1">
@@ -33607,7 +33905,14 @@
             <a:prstGeom prst="line">
               <a:avLst/>
             </a:prstGeom>
-            <a:ln w="19050"/>
+            <a:ln w="19050">
+              <a:solidFill>
+                <a:schemeClr val="accent1">
+                  <a:lumMod val="60000"/>
+                  <a:lumOff val="40000"/>
+                </a:schemeClr>
+              </a:solidFill>
+            </a:ln>
           </p:spPr>
           <p:style>
             <a:lnRef idx="1">
@@ -33648,7 +33953,14 @@
             <a:prstGeom prst="line">
               <a:avLst/>
             </a:prstGeom>
-            <a:ln w="19050"/>
+            <a:ln w="19050">
+              <a:solidFill>
+                <a:schemeClr val="accent1">
+                  <a:lumMod val="60000"/>
+                  <a:lumOff val="40000"/>
+                </a:schemeClr>
+              </a:solidFill>
+            </a:ln>
           </p:spPr>
           <p:style>
             <a:lnRef idx="1">
@@ -33689,7 +34001,14 @@
             <a:prstGeom prst="line">
               <a:avLst/>
             </a:prstGeom>
-            <a:ln w="19050"/>
+            <a:ln w="19050">
+              <a:solidFill>
+                <a:schemeClr val="accent1">
+                  <a:lumMod val="60000"/>
+                  <a:lumOff val="40000"/>
+                </a:schemeClr>
+              </a:solidFill>
+            </a:ln>
           </p:spPr>
           <p:style>
             <a:lnRef idx="1">
@@ -33730,7 +34049,14 @@
             <a:prstGeom prst="line">
               <a:avLst/>
             </a:prstGeom>
-            <a:ln w="19050"/>
+            <a:ln w="19050">
+              <a:solidFill>
+                <a:schemeClr val="accent1">
+                  <a:lumMod val="60000"/>
+                  <a:lumOff val="40000"/>
+                </a:schemeClr>
+              </a:solidFill>
+            </a:ln>
           </p:spPr>
           <p:style>
             <a:lnRef idx="1">
@@ -33771,7 +34097,14 @@
             <a:prstGeom prst="line">
               <a:avLst/>
             </a:prstGeom>
-            <a:ln w="19050"/>
+            <a:ln w="19050">
+              <a:solidFill>
+                <a:schemeClr val="accent1">
+                  <a:lumMod val="60000"/>
+                  <a:lumOff val="40000"/>
+                </a:schemeClr>
+              </a:solidFill>
+            </a:ln>
           </p:spPr>
           <p:style>
             <a:lnRef idx="1">
@@ -33812,7 +34145,14 @@
             <a:prstGeom prst="line">
               <a:avLst/>
             </a:prstGeom>
-            <a:ln w="19050"/>
+            <a:ln w="19050">
+              <a:solidFill>
+                <a:schemeClr val="accent1">
+                  <a:lumMod val="60000"/>
+                  <a:lumOff val="40000"/>
+                </a:schemeClr>
+              </a:solidFill>
+            </a:ln>
           </p:spPr>
           <p:style>
             <a:lnRef idx="1">
@@ -33853,7 +34193,14 @@
             <a:prstGeom prst="line">
               <a:avLst/>
             </a:prstGeom>
-            <a:ln w="19050"/>
+            <a:ln w="19050">
+              <a:solidFill>
+                <a:schemeClr val="accent1">
+                  <a:lumMod val="60000"/>
+                  <a:lumOff val="40000"/>
+                </a:schemeClr>
+              </a:solidFill>
+            </a:ln>
           </p:spPr>
           <p:style>
             <a:lnRef idx="1">

--- a/slides/03-3-Kruskals.pptx
+++ b/slides/03-3-Kruskals.pptx
@@ -14838,643 +14838,664 @@
           </a:p>
         </p:txBody>
       </p:sp>
-      <p:sp>
-        <p:nvSpPr>
-          <p:cNvPr id="2" name="Frame 1">
+      <p:grpSp>
+        <p:nvGrpSpPr>
+          <p:cNvPr id="4" name="Group 3">
             <a:extLst>
               <a:ext uri="{FF2B5EF4-FFF2-40B4-BE49-F238E27FC236}">
-                <a16:creationId xmlns:a16="http://schemas.microsoft.com/office/drawing/2014/main" id="{79DEB2DA-145A-724C-8355-D335FA8CF30D}"/>
+                <a16:creationId xmlns:a16="http://schemas.microsoft.com/office/drawing/2014/main" id="{29E28B66-DC77-AE8A-F5B3-0F3AE93E313B}"/>
               </a:ext>
             </a:extLst>
           </p:cNvPr>
-          <p:cNvSpPr/>
+          <p:cNvGrpSpPr/>
           <p:nvPr/>
-        </p:nvSpPr>
-        <p:spPr>
+        </p:nvGrpSpPr>
+        <p:grpSpPr>
           <a:xfrm>
-            <a:off x="3200407" y="4963506"/>
-            <a:ext cx="685801" cy="685800"/>
+            <a:off x="3200400" y="4963506"/>
+            <a:ext cx="5486413" cy="1371600"/>
+            <a:chOff x="3200400" y="4963506"/>
+            <a:chExt cx="5486413" cy="1371600"/>
           </a:xfrm>
-          <a:prstGeom prst="frame">
-            <a:avLst/>
-          </a:prstGeom>
-        </p:spPr>
-        <p:style>
-          <a:lnRef idx="2">
-            <a:schemeClr val="accent1">
-              <a:shade val="50000"/>
-            </a:schemeClr>
-          </a:lnRef>
-          <a:fillRef idx="1">
-            <a:schemeClr val="accent1"/>
-          </a:fillRef>
-          <a:effectRef idx="0">
-            <a:schemeClr val="accent1"/>
-          </a:effectRef>
-          <a:fontRef idx="minor">
-            <a:schemeClr val="lt1"/>
-          </a:fontRef>
-        </p:style>
-        <p:txBody>
-          <a:bodyPr rtlCol="0" anchor="ctr"/>
-          <a:lstStyle/>
-          <a:p>
-            <a:pPr algn="ctr"/>
-            <a:endParaRPr lang="en-US">
-              <a:solidFill>
-                <a:schemeClr val="tx1"/>
-              </a:solidFill>
-            </a:endParaRPr>
-          </a:p>
-        </p:txBody>
-      </p:sp>
-      <p:sp>
-        <p:nvSpPr>
-          <p:cNvPr id="7" name="Frame 6">
-            <a:extLst>
-              <a:ext uri="{FF2B5EF4-FFF2-40B4-BE49-F238E27FC236}">
-                <a16:creationId xmlns:a16="http://schemas.microsoft.com/office/drawing/2014/main" id="{A738F9C5-15B3-674C-A8C5-53FE8B35A3BC}"/>
-              </a:ext>
-            </a:extLst>
-          </p:cNvPr>
-          <p:cNvSpPr/>
-          <p:nvPr/>
-        </p:nvSpPr>
-        <p:spPr>
-          <a:xfrm>
-            <a:off x="3886208" y="4963506"/>
-            <a:ext cx="685801" cy="685800"/>
-          </a:xfrm>
-          <a:prstGeom prst="frame">
-            <a:avLst/>
-          </a:prstGeom>
-        </p:spPr>
-        <p:style>
-          <a:lnRef idx="2">
-            <a:schemeClr val="accent1">
-              <a:shade val="50000"/>
-            </a:schemeClr>
-          </a:lnRef>
-          <a:fillRef idx="1">
-            <a:schemeClr val="accent1"/>
-          </a:fillRef>
-          <a:effectRef idx="0">
-            <a:schemeClr val="accent1"/>
-          </a:effectRef>
-          <a:fontRef idx="minor">
-            <a:schemeClr val="lt1"/>
-          </a:fontRef>
-        </p:style>
-        <p:txBody>
-          <a:bodyPr rtlCol="0" anchor="ctr"/>
-          <a:lstStyle/>
-          <a:p>
-            <a:pPr algn="ctr"/>
-            <a:endParaRPr lang="en-US">
-              <a:solidFill>
-                <a:schemeClr val="tx1"/>
-              </a:solidFill>
-            </a:endParaRPr>
-          </a:p>
-        </p:txBody>
-      </p:sp>
-      <p:sp>
-        <p:nvSpPr>
-          <p:cNvPr id="8" name="Frame 7">
-            <a:extLst>
-              <a:ext uri="{FF2B5EF4-FFF2-40B4-BE49-F238E27FC236}">
-                <a16:creationId xmlns:a16="http://schemas.microsoft.com/office/drawing/2014/main" id="{54178AD7-7BE8-E640-96D3-9F562CCE40FA}"/>
-              </a:ext>
-            </a:extLst>
-          </p:cNvPr>
-          <p:cNvSpPr/>
-          <p:nvPr/>
-        </p:nvSpPr>
-        <p:spPr>
-          <a:xfrm>
-            <a:off x="4572009" y="4963506"/>
-            <a:ext cx="685801" cy="685800"/>
-          </a:xfrm>
-          <a:prstGeom prst="frame">
-            <a:avLst/>
-          </a:prstGeom>
-        </p:spPr>
-        <p:style>
-          <a:lnRef idx="2">
-            <a:schemeClr val="accent1">
-              <a:shade val="50000"/>
-            </a:schemeClr>
-          </a:lnRef>
-          <a:fillRef idx="1">
-            <a:schemeClr val="accent1"/>
-          </a:fillRef>
-          <a:effectRef idx="0">
-            <a:schemeClr val="accent1"/>
-          </a:effectRef>
-          <a:fontRef idx="minor">
-            <a:schemeClr val="lt1"/>
-          </a:fontRef>
-        </p:style>
-        <p:txBody>
-          <a:bodyPr rtlCol="0" anchor="ctr"/>
-          <a:lstStyle/>
-          <a:p>
-            <a:pPr algn="ctr"/>
-            <a:endParaRPr lang="en-US">
-              <a:solidFill>
-                <a:schemeClr val="tx1"/>
-              </a:solidFill>
-            </a:endParaRPr>
-          </a:p>
-        </p:txBody>
-      </p:sp>
-      <p:sp>
-        <p:nvSpPr>
-          <p:cNvPr id="9" name="Frame 8">
-            <a:extLst>
-              <a:ext uri="{FF2B5EF4-FFF2-40B4-BE49-F238E27FC236}">
-                <a16:creationId xmlns:a16="http://schemas.microsoft.com/office/drawing/2014/main" id="{A66DE4D0-8660-354C-B36C-DB3DB8FA359F}"/>
-              </a:ext>
-            </a:extLst>
-          </p:cNvPr>
-          <p:cNvSpPr/>
-          <p:nvPr/>
-        </p:nvSpPr>
-        <p:spPr>
-          <a:xfrm>
-            <a:off x="5257810" y="4963506"/>
-            <a:ext cx="685801" cy="685800"/>
-          </a:xfrm>
-          <a:prstGeom prst="frame">
-            <a:avLst/>
-          </a:prstGeom>
-        </p:spPr>
-        <p:style>
-          <a:lnRef idx="2">
-            <a:schemeClr val="accent1">
-              <a:shade val="50000"/>
-            </a:schemeClr>
-          </a:lnRef>
-          <a:fillRef idx="1">
-            <a:schemeClr val="accent1"/>
-          </a:fillRef>
-          <a:effectRef idx="0">
-            <a:schemeClr val="accent1"/>
-          </a:effectRef>
-          <a:fontRef idx="minor">
-            <a:schemeClr val="lt1"/>
-          </a:fontRef>
-        </p:style>
-        <p:txBody>
-          <a:bodyPr rtlCol="0" anchor="ctr"/>
-          <a:lstStyle/>
-          <a:p>
-            <a:pPr algn="ctr"/>
-            <a:endParaRPr lang="en-US">
-              <a:solidFill>
-                <a:schemeClr val="tx1"/>
-              </a:solidFill>
-            </a:endParaRPr>
-          </a:p>
-        </p:txBody>
-      </p:sp>
-      <p:sp>
-        <p:nvSpPr>
-          <p:cNvPr id="10" name="Frame 9">
-            <a:extLst>
-              <a:ext uri="{FF2B5EF4-FFF2-40B4-BE49-F238E27FC236}">
-                <a16:creationId xmlns:a16="http://schemas.microsoft.com/office/drawing/2014/main" id="{4C68D5E2-CC3F-BF46-B682-9EF1FE6E6E47}"/>
-              </a:ext>
-            </a:extLst>
-          </p:cNvPr>
-          <p:cNvSpPr/>
-          <p:nvPr/>
-        </p:nvSpPr>
-        <p:spPr>
-          <a:xfrm>
-            <a:off x="5943609" y="4963506"/>
-            <a:ext cx="685801" cy="685800"/>
-          </a:xfrm>
-          <a:prstGeom prst="frame">
-            <a:avLst/>
-          </a:prstGeom>
-        </p:spPr>
-        <p:style>
-          <a:lnRef idx="2">
-            <a:schemeClr val="accent1">
-              <a:shade val="50000"/>
-            </a:schemeClr>
-          </a:lnRef>
-          <a:fillRef idx="1">
-            <a:schemeClr val="accent1"/>
-          </a:fillRef>
-          <a:effectRef idx="0">
-            <a:schemeClr val="accent1"/>
-          </a:effectRef>
-          <a:fontRef idx="minor">
-            <a:schemeClr val="lt1"/>
-          </a:fontRef>
-        </p:style>
-        <p:txBody>
-          <a:bodyPr rtlCol="0" anchor="ctr"/>
-          <a:lstStyle/>
-          <a:p>
-            <a:pPr algn="ctr"/>
-            <a:endParaRPr lang="en-US">
-              <a:solidFill>
-                <a:schemeClr val="tx1"/>
-              </a:solidFill>
-            </a:endParaRPr>
-          </a:p>
-        </p:txBody>
-      </p:sp>
-      <p:sp>
-        <p:nvSpPr>
-          <p:cNvPr id="11" name="Frame 10">
-            <a:extLst>
-              <a:ext uri="{FF2B5EF4-FFF2-40B4-BE49-F238E27FC236}">
-                <a16:creationId xmlns:a16="http://schemas.microsoft.com/office/drawing/2014/main" id="{39883BB8-DF86-0B49-8080-6961C7119869}"/>
-              </a:ext>
-            </a:extLst>
-          </p:cNvPr>
-          <p:cNvSpPr/>
-          <p:nvPr/>
-        </p:nvSpPr>
-        <p:spPr>
-          <a:xfrm>
-            <a:off x="6629410" y="4963506"/>
-            <a:ext cx="685801" cy="685800"/>
-          </a:xfrm>
-          <a:prstGeom prst="frame">
-            <a:avLst/>
-          </a:prstGeom>
-        </p:spPr>
-        <p:style>
-          <a:lnRef idx="2">
-            <a:schemeClr val="accent1">
-              <a:shade val="50000"/>
-            </a:schemeClr>
-          </a:lnRef>
-          <a:fillRef idx="1">
-            <a:schemeClr val="accent1"/>
-          </a:fillRef>
-          <a:effectRef idx="0">
-            <a:schemeClr val="accent1"/>
-          </a:effectRef>
-          <a:fontRef idx="minor">
-            <a:schemeClr val="lt1"/>
-          </a:fontRef>
-        </p:style>
-        <p:txBody>
-          <a:bodyPr rtlCol="0" anchor="ctr"/>
-          <a:lstStyle/>
-          <a:p>
-            <a:pPr algn="ctr"/>
-            <a:endParaRPr lang="en-US">
-              <a:solidFill>
-                <a:schemeClr val="tx1"/>
-              </a:solidFill>
-            </a:endParaRPr>
-          </a:p>
-        </p:txBody>
-      </p:sp>
-      <p:sp>
-        <p:nvSpPr>
-          <p:cNvPr id="12" name="Frame 11">
-            <a:extLst>
-              <a:ext uri="{FF2B5EF4-FFF2-40B4-BE49-F238E27FC236}">
-                <a16:creationId xmlns:a16="http://schemas.microsoft.com/office/drawing/2014/main" id="{B45E09A4-D388-B34F-A618-EAD0DFE2A910}"/>
-              </a:ext>
-            </a:extLst>
-          </p:cNvPr>
-          <p:cNvSpPr/>
-          <p:nvPr/>
-        </p:nvSpPr>
-        <p:spPr>
-          <a:xfrm>
-            <a:off x="7315211" y="4963506"/>
-            <a:ext cx="685801" cy="685800"/>
-          </a:xfrm>
-          <a:prstGeom prst="frame">
-            <a:avLst/>
-          </a:prstGeom>
-        </p:spPr>
-        <p:style>
-          <a:lnRef idx="2">
-            <a:schemeClr val="accent1">
-              <a:shade val="50000"/>
-            </a:schemeClr>
-          </a:lnRef>
-          <a:fillRef idx="1">
-            <a:schemeClr val="accent1"/>
-          </a:fillRef>
-          <a:effectRef idx="0">
-            <a:schemeClr val="accent1"/>
-          </a:effectRef>
-          <a:fontRef idx="minor">
-            <a:schemeClr val="lt1"/>
-          </a:fontRef>
-        </p:style>
-        <p:txBody>
-          <a:bodyPr rtlCol="0" anchor="ctr"/>
-          <a:lstStyle/>
-          <a:p>
-            <a:pPr algn="ctr"/>
-            <a:endParaRPr lang="en-US">
-              <a:solidFill>
-                <a:schemeClr val="tx1"/>
-              </a:solidFill>
-            </a:endParaRPr>
-          </a:p>
-        </p:txBody>
-      </p:sp>
-      <p:sp>
-        <p:nvSpPr>
-          <p:cNvPr id="13" name="Frame 12">
-            <a:extLst>
-              <a:ext uri="{FF2B5EF4-FFF2-40B4-BE49-F238E27FC236}">
-                <a16:creationId xmlns:a16="http://schemas.microsoft.com/office/drawing/2014/main" id="{60A06877-D8CF-4544-8709-1E36A67C64DC}"/>
-              </a:ext>
-            </a:extLst>
-          </p:cNvPr>
-          <p:cNvSpPr/>
-          <p:nvPr/>
-        </p:nvSpPr>
-        <p:spPr>
-          <a:xfrm>
-            <a:off x="8001012" y="4963506"/>
-            <a:ext cx="685801" cy="685800"/>
-          </a:xfrm>
-          <a:prstGeom prst="frame">
-            <a:avLst/>
-          </a:prstGeom>
-        </p:spPr>
-        <p:style>
-          <a:lnRef idx="2">
-            <a:schemeClr val="accent1">
-              <a:shade val="50000"/>
-            </a:schemeClr>
-          </a:lnRef>
-          <a:fillRef idx="1">
-            <a:schemeClr val="accent1"/>
-          </a:fillRef>
-          <a:effectRef idx="0">
-            <a:schemeClr val="accent1"/>
-          </a:effectRef>
-          <a:fontRef idx="minor">
-            <a:schemeClr val="lt1"/>
-          </a:fontRef>
-        </p:style>
-        <p:txBody>
-          <a:bodyPr rtlCol="0" anchor="ctr"/>
-          <a:lstStyle/>
-          <a:p>
-            <a:pPr algn="ctr"/>
-            <a:endParaRPr lang="en-US">
-              <a:solidFill>
-                <a:schemeClr val="tx1"/>
-              </a:solidFill>
-            </a:endParaRPr>
-          </a:p>
-        </p:txBody>
-      </p:sp>
-      <p:sp>
-        <p:nvSpPr>
-          <p:cNvPr id="14" name="Rectangle 3">
-            <a:extLst>
-              <a:ext uri="{FF2B5EF4-FFF2-40B4-BE49-F238E27FC236}">
-                <a16:creationId xmlns:a16="http://schemas.microsoft.com/office/drawing/2014/main" id="{0E5A8076-DD7C-5C4F-8A0B-8BF37F39908F}"/>
-              </a:ext>
-            </a:extLst>
-          </p:cNvPr>
-          <p:cNvSpPr txBox="1">
-            <a:spLocks noChangeArrowheads="1"/>
-          </p:cNvSpPr>
-          <p:nvPr>
-            <p:custDataLst>
-              <p:tags r:id="rId3"/>
-            </p:custDataLst>
-          </p:nvPr>
-        </p:nvSpPr>
-        <p:spPr>
-          <a:xfrm>
-            <a:off x="3200400" y="5192106"/>
-            <a:ext cx="5486406" cy="1143000"/>
-          </a:xfrm>
-          <a:prstGeom prst="rect">
-            <a:avLst/>
-          </a:prstGeom>
-        </p:spPr>
-        <p:txBody>
-          <a:bodyPr vert="horz">
-            <a:normAutofit/>
-          </a:bodyPr>
-          <a:lstStyle>
-            <a:lvl1pPr marL="274320" indent="-274320" algn="just" rtl="0" eaLnBrk="1" latinLnBrk="0" hangingPunct="1">
-              <a:spcBef>
-                <a:spcPts val="600"/>
-              </a:spcBef>
-              <a:buClr>
-                <a:schemeClr val="accent1"/>
-              </a:buClr>
-              <a:buSzPct val="76000"/>
-              <a:buFont typeface="Wingdings 3"/>
-              <a:buChar char=""/>
-              <a:defRPr kumimoji="0" sz="2600" kern="1200">
+        </p:grpSpPr>
+        <p:sp>
+          <p:nvSpPr>
+            <p:cNvPr id="2" name="Frame 1">
+              <a:extLst>
+                <a:ext uri="{FF2B5EF4-FFF2-40B4-BE49-F238E27FC236}">
+                  <a16:creationId xmlns:a16="http://schemas.microsoft.com/office/drawing/2014/main" id="{79DEB2DA-145A-724C-8355-D335FA8CF30D}"/>
+                </a:ext>
+              </a:extLst>
+            </p:cNvPr>
+            <p:cNvSpPr/>
+            <p:nvPr/>
+          </p:nvSpPr>
+          <p:spPr>
+            <a:xfrm>
+              <a:off x="3200407" y="4963506"/>
+              <a:ext cx="685801" cy="685800"/>
+            </a:xfrm>
+            <a:prstGeom prst="frame">
+              <a:avLst/>
+            </a:prstGeom>
+          </p:spPr>
+          <p:style>
+            <a:lnRef idx="2">
+              <a:schemeClr val="accent1">
+                <a:shade val="50000"/>
+              </a:schemeClr>
+            </a:lnRef>
+            <a:fillRef idx="1">
+              <a:schemeClr val="accent1"/>
+            </a:fillRef>
+            <a:effectRef idx="0">
+              <a:schemeClr val="accent1"/>
+            </a:effectRef>
+            <a:fontRef idx="minor">
+              <a:schemeClr val="lt1"/>
+            </a:fontRef>
+          </p:style>
+          <p:txBody>
+            <a:bodyPr rtlCol="0" anchor="ctr"/>
+            <a:lstStyle/>
+            <a:p>
+              <a:pPr algn="ctr"/>
+              <a:endParaRPr lang="en-US">
                 <a:solidFill>
                   <a:schemeClr val="tx1"/>
                 </a:solidFill>
-                <a:latin typeface="+mn-lt"/>
-                <a:ea typeface="+mn-ea"/>
-                <a:cs typeface="+mn-cs"/>
-              </a:defRPr>
-            </a:lvl1pPr>
-            <a:lvl2pPr marL="548640" indent="-274320" algn="just" rtl="0" eaLnBrk="1" latinLnBrk="0" hangingPunct="1">
-              <a:spcBef>
-                <a:spcPts val="500"/>
-              </a:spcBef>
-              <a:buClr>
-                <a:schemeClr val="accent2"/>
-              </a:buClr>
-              <a:buSzPct val="76000"/>
-              <a:buFont typeface="Wingdings 3"/>
-              <a:buChar char=""/>
-              <a:defRPr kumimoji="0" sz="2300" kern="1200">
-                <a:solidFill>
-                  <a:schemeClr val="tx2"/>
-                </a:solidFill>
-                <a:latin typeface="+mn-lt"/>
-                <a:ea typeface="+mn-ea"/>
-                <a:cs typeface="+mn-cs"/>
-              </a:defRPr>
-            </a:lvl2pPr>
-            <a:lvl3pPr marL="822960" indent="-228600" algn="just" rtl="0" eaLnBrk="1" latinLnBrk="0" hangingPunct="1">
-              <a:spcBef>
-                <a:spcPts val="500"/>
-              </a:spcBef>
-              <a:buClr>
-                <a:schemeClr val="bg1">
-                  <a:shade val="50000"/>
-                </a:schemeClr>
-              </a:buClr>
-              <a:buSzPct val="76000"/>
-              <a:buFont typeface="Wingdings 3"/>
-              <a:buChar char=""/>
-              <a:defRPr kumimoji="0" sz="2000" kern="1200">
+              </a:endParaRPr>
+            </a:p>
+          </p:txBody>
+        </p:sp>
+        <p:sp>
+          <p:nvSpPr>
+            <p:cNvPr id="7" name="Frame 6">
+              <a:extLst>
+                <a:ext uri="{FF2B5EF4-FFF2-40B4-BE49-F238E27FC236}">
+                  <a16:creationId xmlns:a16="http://schemas.microsoft.com/office/drawing/2014/main" id="{A738F9C5-15B3-674C-A8C5-53FE8B35A3BC}"/>
+                </a:ext>
+              </a:extLst>
+            </p:cNvPr>
+            <p:cNvSpPr/>
+            <p:nvPr/>
+          </p:nvSpPr>
+          <p:spPr>
+            <a:xfrm>
+              <a:off x="3886208" y="4963506"/>
+              <a:ext cx="685801" cy="685800"/>
+            </a:xfrm>
+            <a:prstGeom prst="frame">
+              <a:avLst/>
+            </a:prstGeom>
+          </p:spPr>
+          <p:style>
+            <a:lnRef idx="2">
+              <a:schemeClr val="accent1">
+                <a:shade val="50000"/>
+              </a:schemeClr>
+            </a:lnRef>
+            <a:fillRef idx="1">
+              <a:schemeClr val="accent1"/>
+            </a:fillRef>
+            <a:effectRef idx="0">
+              <a:schemeClr val="accent1"/>
+            </a:effectRef>
+            <a:fontRef idx="minor">
+              <a:schemeClr val="lt1"/>
+            </a:fontRef>
+          </p:style>
+          <p:txBody>
+            <a:bodyPr rtlCol="0" anchor="ctr"/>
+            <a:lstStyle/>
+            <a:p>
+              <a:pPr algn="ctr"/>
+              <a:endParaRPr lang="en-US">
                 <a:solidFill>
                   <a:schemeClr val="tx1"/>
                 </a:solidFill>
-                <a:latin typeface="+mn-lt"/>
-                <a:ea typeface="+mn-ea"/>
-                <a:cs typeface="+mn-cs"/>
-              </a:defRPr>
-            </a:lvl3pPr>
-            <a:lvl4pPr marL="1097280" indent="-228600" algn="just" rtl="0" eaLnBrk="1" latinLnBrk="0" hangingPunct="1">
-              <a:spcBef>
-                <a:spcPts val="400"/>
-              </a:spcBef>
-              <a:buClr>
-                <a:schemeClr val="accent2">
-                  <a:shade val="75000"/>
-                </a:schemeClr>
-              </a:buClr>
-              <a:buSzPct val="70000"/>
-              <a:buFont typeface="Wingdings"/>
-              <a:buChar char=""/>
-              <a:defRPr kumimoji="0" sz="1800" kern="1200">
+              </a:endParaRPr>
+            </a:p>
+          </p:txBody>
+        </p:sp>
+        <p:sp>
+          <p:nvSpPr>
+            <p:cNvPr id="8" name="Frame 7">
+              <a:extLst>
+                <a:ext uri="{FF2B5EF4-FFF2-40B4-BE49-F238E27FC236}">
+                  <a16:creationId xmlns:a16="http://schemas.microsoft.com/office/drawing/2014/main" id="{54178AD7-7BE8-E640-96D3-9F562CCE40FA}"/>
+                </a:ext>
+              </a:extLst>
+            </p:cNvPr>
+            <p:cNvSpPr/>
+            <p:nvPr/>
+          </p:nvSpPr>
+          <p:spPr>
+            <a:xfrm>
+              <a:off x="4572009" y="4963506"/>
+              <a:ext cx="685801" cy="685800"/>
+            </a:xfrm>
+            <a:prstGeom prst="frame">
+              <a:avLst/>
+            </a:prstGeom>
+          </p:spPr>
+          <p:style>
+            <a:lnRef idx="2">
+              <a:schemeClr val="accent1">
+                <a:shade val="50000"/>
+              </a:schemeClr>
+            </a:lnRef>
+            <a:fillRef idx="1">
+              <a:schemeClr val="accent1"/>
+            </a:fillRef>
+            <a:effectRef idx="0">
+              <a:schemeClr val="accent1"/>
+            </a:effectRef>
+            <a:fontRef idx="minor">
+              <a:schemeClr val="lt1"/>
+            </a:fontRef>
+          </p:style>
+          <p:txBody>
+            <a:bodyPr rtlCol="0" anchor="ctr"/>
+            <a:lstStyle/>
+            <a:p>
+              <a:pPr algn="ctr"/>
+              <a:endParaRPr lang="en-US">
                 <a:solidFill>
                   <a:schemeClr val="tx1"/>
                 </a:solidFill>
-                <a:latin typeface="+mn-lt"/>
-                <a:ea typeface="+mn-ea"/>
-                <a:cs typeface="+mn-cs"/>
-              </a:defRPr>
-            </a:lvl4pPr>
-            <a:lvl5pPr marL="1371600" indent="-228600" algn="just" rtl="0" eaLnBrk="1" latinLnBrk="0" hangingPunct="1">
-              <a:spcBef>
-                <a:spcPts val="300"/>
-              </a:spcBef>
-              <a:buClr>
-                <a:schemeClr val="accent2"/>
-              </a:buClr>
-              <a:buSzPct val="70000"/>
-              <a:buFont typeface="Wingdings"/>
-              <a:buChar char=""/>
-              <a:defRPr kumimoji="0" sz="1600" kern="1200">
+              </a:endParaRPr>
+            </a:p>
+          </p:txBody>
+        </p:sp>
+        <p:sp>
+          <p:nvSpPr>
+            <p:cNvPr id="9" name="Frame 8">
+              <a:extLst>
+                <a:ext uri="{FF2B5EF4-FFF2-40B4-BE49-F238E27FC236}">
+                  <a16:creationId xmlns:a16="http://schemas.microsoft.com/office/drawing/2014/main" id="{A66DE4D0-8660-354C-B36C-DB3DB8FA359F}"/>
+                </a:ext>
+              </a:extLst>
+            </p:cNvPr>
+            <p:cNvSpPr/>
+            <p:nvPr/>
+          </p:nvSpPr>
+          <p:spPr>
+            <a:xfrm>
+              <a:off x="5257810" y="4963506"/>
+              <a:ext cx="685801" cy="685800"/>
+            </a:xfrm>
+            <a:prstGeom prst="frame">
+              <a:avLst/>
+            </a:prstGeom>
+          </p:spPr>
+          <p:style>
+            <a:lnRef idx="2">
+              <a:schemeClr val="accent1">
+                <a:shade val="50000"/>
+              </a:schemeClr>
+            </a:lnRef>
+            <a:fillRef idx="1">
+              <a:schemeClr val="accent1"/>
+            </a:fillRef>
+            <a:effectRef idx="0">
+              <a:schemeClr val="accent1"/>
+            </a:effectRef>
+            <a:fontRef idx="minor">
+              <a:schemeClr val="lt1"/>
+            </a:fontRef>
+          </p:style>
+          <p:txBody>
+            <a:bodyPr rtlCol="0" anchor="ctr"/>
+            <a:lstStyle/>
+            <a:p>
+              <a:pPr algn="ctr"/>
+              <a:endParaRPr lang="en-US">
                 <a:solidFill>
                   <a:schemeClr val="tx1"/>
                 </a:solidFill>
-                <a:latin typeface="+mn-lt"/>
-                <a:ea typeface="+mn-ea"/>
-                <a:cs typeface="+mn-cs"/>
-              </a:defRPr>
-            </a:lvl5pPr>
-            <a:lvl6pPr marL="1645920" indent="-182880" algn="l" rtl="0" eaLnBrk="1" latinLnBrk="0" hangingPunct="1">
-              <a:spcBef>
-                <a:spcPts val="300"/>
-              </a:spcBef>
-              <a:buClr>
-                <a:srgbClr val="9FB8CD">
-                  <a:shade val="75000"/>
-                </a:srgbClr>
-              </a:buClr>
-              <a:buSzPct val="75000"/>
-              <a:buFont typeface="Wingdings 3"/>
-              <a:buChar char=""/>
-              <a:defRPr kumimoji="0" lang="en-US" sz="1600" kern="1200" smtClean="0">
+              </a:endParaRPr>
+            </a:p>
+          </p:txBody>
+        </p:sp>
+        <p:sp>
+          <p:nvSpPr>
+            <p:cNvPr id="10" name="Frame 9">
+              <a:extLst>
+                <a:ext uri="{FF2B5EF4-FFF2-40B4-BE49-F238E27FC236}">
+                  <a16:creationId xmlns:a16="http://schemas.microsoft.com/office/drawing/2014/main" id="{4C68D5E2-CC3F-BF46-B682-9EF1FE6E6E47}"/>
+                </a:ext>
+              </a:extLst>
+            </p:cNvPr>
+            <p:cNvSpPr/>
+            <p:nvPr/>
+          </p:nvSpPr>
+          <p:spPr>
+            <a:xfrm>
+              <a:off x="5943609" y="4963506"/>
+              <a:ext cx="685801" cy="685800"/>
+            </a:xfrm>
+            <a:prstGeom prst="frame">
+              <a:avLst/>
+            </a:prstGeom>
+          </p:spPr>
+          <p:style>
+            <a:lnRef idx="2">
+              <a:schemeClr val="accent1">
+                <a:shade val="50000"/>
+              </a:schemeClr>
+            </a:lnRef>
+            <a:fillRef idx="1">
+              <a:schemeClr val="accent1"/>
+            </a:fillRef>
+            <a:effectRef idx="0">
+              <a:schemeClr val="accent1"/>
+            </a:effectRef>
+            <a:fontRef idx="minor">
+              <a:schemeClr val="lt1"/>
+            </a:fontRef>
+          </p:style>
+          <p:txBody>
+            <a:bodyPr rtlCol="0" anchor="ctr"/>
+            <a:lstStyle/>
+            <a:p>
+              <a:pPr algn="ctr"/>
+              <a:endParaRPr lang="en-US">
                 <a:solidFill>
                   <a:schemeClr val="tx1"/>
                 </a:solidFill>
-                <a:latin typeface="+mn-lt"/>
-                <a:ea typeface="+mn-ea"/>
-                <a:cs typeface="+mn-cs"/>
-              </a:defRPr>
-            </a:lvl6pPr>
-            <a:lvl7pPr marL="1828800" indent="-182880" algn="l" rtl="0" eaLnBrk="1" latinLnBrk="0" hangingPunct="1">
-              <a:spcBef>
-                <a:spcPts val="300"/>
-              </a:spcBef>
-              <a:buClr>
-                <a:srgbClr val="727CA3">
-                  <a:shade val="75000"/>
-                </a:srgbClr>
-              </a:buClr>
-              <a:buSzPct val="75000"/>
-              <a:buFont typeface="Wingdings 3"/>
-              <a:buChar char=""/>
-              <a:defRPr kumimoji="0" lang="en-US" sz="1400" kern="1200" smtClean="0">
+              </a:endParaRPr>
+            </a:p>
+          </p:txBody>
+        </p:sp>
+        <p:sp>
+          <p:nvSpPr>
+            <p:cNvPr id="11" name="Frame 10">
+              <a:extLst>
+                <a:ext uri="{FF2B5EF4-FFF2-40B4-BE49-F238E27FC236}">
+                  <a16:creationId xmlns:a16="http://schemas.microsoft.com/office/drawing/2014/main" id="{39883BB8-DF86-0B49-8080-6961C7119869}"/>
+                </a:ext>
+              </a:extLst>
+            </p:cNvPr>
+            <p:cNvSpPr/>
+            <p:nvPr/>
+          </p:nvSpPr>
+          <p:spPr>
+            <a:xfrm>
+              <a:off x="6629410" y="4963506"/>
+              <a:ext cx="685801" cy="685800"/>
+            </a:xfrm>
+            <a:prstGeom prst="frame">
+              <a:avLst/>
+            </a:prstGeom>
+          </p:spPr>
+          <p:style>
+            <a:lnRef idx="2">
+              <a:schemeClr val="accent1">
+                <a:shade val="50000"/>
+              </a:schemeClr>
+            </a:lnRef>
+            <a:fillRef idx="1">
+              <a:schemeClr val="accent1"/>
+            </a:fillRef>
+            <a:effectRef idx="0">
+              <a:schemeClr val="accent1"/>
+            </a:effectRef>
+            <a:fontRef idx="minor">
+              <a:schemeClr val="lt1"/>
+            </a:fontRef>
+          </p:style>
+          <p:txBody>
+            <a:bodyPr rtlCol="0" anchor="ctr"/>
+            <a:lstStyle/>
+            <a:p>
+              <a:pPr algn="ctr"/>
+              <a:endParaRPr lang="en-US">
                 <a:solidFill>
                   <a:schemeClr val="tx1"/>
                 </a:solidFill>
-                <a:latin typeface="+mn-lt"/>
-                <a:ea typeface="+mn-ea"/>
-                <a:cs typeface="+mn-cs"/>
-              </a:defRPr>
-            </a:lvl7pPr>
-            <a:lvl8pPr marL="2011680" indent="-182880" algn="l" rtl="0" eaLnBrk="1" latinLnBrk="0" hangingPunct="1">
-              <a:spcBef>
-                <a:spcPts val="300"/>
-              </a:spcBef>
-              <a:buClr>
-                <a:prstClr val="white">
-                  <a:shade val="50000"/>
-                </a:prstClr>
-              </a:buClr>
-              <a:buSzPct val="75000"/>
-              <a:buFont typeface="Wingdings 3"/>
-              <a:buChar char=""/>
-              <a:defRPr kumimoji="0" lang="en-US" sz="1400" kern="1200" smtClean="0">
+              </a:endParaRPr>
+            </a:p>
+          </p:txBody>
+        </p:sp>
+        <p:sp>
+          <p:nvSpPr>
+            <p:cNvPr id="12" name="Frame 11">
+              <a:extLst>
+                <a:ext uri="{FF2B5EF4-FFF2-40B4-BE49-F238E27FC236}">
+                  <a16:creationId xmlns:a16="http://schemas.microsoft.com/office/drawing/2014/main" id="{B45E09A4-D388-B34F-A618-EAD0DFE2A910}"/>
+                </a:ext>
+              </a:extLst>
+            </p:cNvPr>
+            <p:cNvSpPr/>
+            <p:nvPr/>
+          </p:nvSpPr>
+          <p:spPr>
+            <a:xfrm>
+              <a:off x="7315211" y="4963506"/>
+              <a:ext cx="685801" cy="685800"/>
+            </a:xfrm>
+            <a:prstGeom prst="frame">
+              <a:avLst/>
+            </a:prstGeom>
+          </p:spPr>
+          <p:style>
+            <a:lnRef idx="2">
+              <a:schemeClr val="accent1">
+                <a:shade val="50000"/>
+              </a:schemeClr>
+            </a:lnRef>
+            <a:fillRef idx="1">
+              <a:schemeClr val="accent1"/>
+            </a:fillRef>
+            <a:effectRef idx="0">
+              <a:schemeClr val="accent1"/>
+            </a:effectRef>
+            <a:fontRef idx="minor">
+              <a:schemeClr val="lt1"/>
+            </a:fontRef>
+          </p:style>
+          <p:txBody>
+            <a:bodyPr rtlCol="0" anchor="ctr"/>
+            <a:lstStyle/>
+            <a:p>
+              <a:pPr algn="ctr"/>
+              <a:endParaRPr lang="en-US">
                 <a:solidFill>
                   <a:schemeClr val="tx1"/>
                 </a:solidFill>
-                <a:latin typeface="+mn-lt"/>
-                <a:ea typeface="+mn-ea"/>
-                <a:cs typeface="+mn-cs"/>
-              </a:defRPr>
-            </a:lvl8pPr>
-            <a:lvl9pPr marL="2194560" indent="-182880" algn="l" rtl="0" eaLnBrk="1" latinLnBrk="0" hangingPunct="1">
-              <a:spcBef>
-                <a:spcPts val="300"/>
-              </a:spcBef>
-              <a:buClr>
-                <a:srgbClr val="9FB8CD"/>
-              </a:buClr>
-              <a:buSzPct val="75000"/>
-              <a:buFont typeface="Wingdings 3"/>
-              <a:buChar char=""/>
-              <a:defRPr kumimoji="0" lang="en-US" sz="1200" kern="1200" smtClean="0">
+              </a:endParaRPr>
+            </a:p>
+          </p:txBody>
+        </p:sp>
+        <p:sp>
+          <p:nvSpPr>
+            <p:cNvPr id="13" name="Frame 12">
+              <a:extLst>
+                <a:ext uri="{FF2B5EF4-FFF2-40B4-BE49-F238E27FC236}">
+                  <a16:creationId xmlns:a16="http://schemas.microsoft.com/office/drawing/2014/main" id="{60A06877-D8CF-4544-8709-1E36A67C64DC}"/>
+                </a:ext>
+              </a:extLst>
+            </p:cNvPr>
+            <p:cNvSpPr/>
+            <p:nvPr/>
+          </p:nvSpPr>
+          <p:spPr>
+            <a:xfrm>
+              <a:off x="8001012" y="4963506"/>
+              <a:ext cx="685801" cy="685800"/>
+            </a:xfrm>
+            <a:prstGeom prst="frame">
+              <a:avLst/>
+            </a:prstGeom>
+          </p:spPr>
+          <p:style>
+            <a:lnRef idx="2">
+              <a:schemeClr val="accent1">
+                <a:shade val="50000"/>
+              </a:schemeClr>
+            </a:lnRef>
+            <a:fillRef idx="1">
+              <a:schemeClr val="accent1"/>
+            </a:fillRef>
+            <a:effectRef idx="0">
+              <a:schemeClr val="accent1"/>
+            </a:effectRef>
+            <a:fontRef idx="minor">
+              <a:schemeClr val="lt1"/>
+            </a:fontRef>
+          </p:style>
+          <p:txBody>
+            <a:bodyPr rtlCol="0" anchor="ctr"/>
+            <a:lstStyle/>
+            <a:p>
+              <a:pPr algn="ctr"/>
+              <a:endParaRPr lang="en-US">
                 <a:solidFill>
                   <a:schemeClr val="tx1"/>
                 </a:solidFill>
-                <a:latin typeface="+mn-lt"/>
-                <a:ea typeface="+mn-ea"/>
-                <a:cs typeface="+mn-cs"/>
-              </a:defRPr>
-            </a:lvl9pPr>
-          </a:lstStyle>
-          <a:p>
-            <a:pPr marL="0" indent="0" algn="ctr" fontAlgn="auto">
-              <a:spcAft>
-                <a:spcPts val="0"/>
-              </a:spcAft>
-              <a:buNone/>
-            </a:pPr>
-            <a:endParaRPr lang="en-US" dirty="0"/>
-          </a:p>
-          <a:p>
-            <a:pPr marL="0" indent="0" algn="l" fontAlgn="auto">
-              <a:spcAft>
-                <a:spcPts val="0"/>
-              </a:spcAft>
-              <a:buNone/>
-            </a:pPr>
-            <a:r>
-              <a:rPr lang="en-US" i="1" dirty="0"/>
-              <a:t>  0      1     2     3      4      5      6      7</a:t>
-            </a:r>
-          </a:p>
-        </p:txBody>
-      </p:sp>
+              </a:endParaRPr>
+            </a:p>
+          </p:txBody>
+        </p:sp>
+        <p:sp>
+          <p:nvSpPr>
+            <p:cNvPr id="14" name="Rectangle 3">
+              <a:extLst>
+                <a:ext uri="{FF2B5EF4-FFF2-40B4-BE49-F238E27FC236}">
+                  <a16:creationId xmlns:a16="http://schemas.microsoft.com/office/drawing/2014/main" id="{0E5A8076-DD7C-5C4F-8A0B-8BF37F39908F}"/>
+                </a:ext>
+              </a:extLst>
+            </p:cNvPr>
+            <p:cNvSpPr txBox="1">
+              <a:spLocks noChangeArrowheads="1"/>
+            </p:cNvSpPr>
+            <p:nvPr>
+              <p:custDataLst>
+                <p:tags r:id="rId6"/>
+              </p:custDataLst>
+            </p:nvPr>
+          </p:nvSpPr>
+          <p:spPr>
+            <a:xfrm>
+              <a:off x="3200400" y="5192106"/>
+              <a:ext cx="5486406" cy="1143000"/>
+            </a:xfrm>
+            <a:prstGeom prst="rect">
+              <a:avLst/>
+            </a:prstGeom>
+          </p:spPr>
+          <p:txBody>
+            <a:bodyPr vert="horz">
+              <a:normAutofit/>
+            </a:bodyPr>
+            <a:lstStyle>
+              <a:lvl1pPr marL="274320" indent="-274320" algn="just" rtl="0" eaLnBrk="1" latinLnBrk="0" hangingPunct="1">
+                <a:spcBef>
+                  <a:spcPts val="600"/>
+                </a:spcBef>
+                <a:buClr>
+                  <a:schemeClr val="accent1"/>
+                </a:buClr>
+                <a:buSzPct val="76000"/>
+                <a:buFont typeface="Wingdings 3"/>
+                <a:buChar char=""/>
+                <a:defRPr kumimoji="0" sz="2600" kern="1200">
+                  <a:solidFill>
+                    <a:schemeClr val="tx1"/>
+                  </a:solidFill>
+                  <a:latin typeface="+mn-lt"/>
+                  <a:ea typeface="+mn-ea"/>
+                  <a:cs typeface="+mn-cs"/>
+                </a:defRPr>
+              </a:lvl1pPr>
+              <a:lvl2pPr marL="548640" indent="-274320" algn="just" rtl="0" eaLnBrk="1" latinLnBrk="0" hangingPunct="1">
+                <a:spcBef>
+                  <a:spcPts val="500"/>
+                </a:spcBef>
+                <a:buClr>
+                  <a:schemeClr val="accent2"/>
+                </a:buClr>
+                <a:buSzPct val="76000"/>
+                <a:buFont typeface="Wingdings 3"/>
+                <a:buChar char=""/>
+                <a:defRPr kumimoji="0" sz="2300" kern="1200">
+                  <a:solidFill>
+                    <a:schemeClr val="tx2"/>
+                  </a:solidFill>
+                  <a:latin typeface="+mn-lt"/>
+                  <a:ea typeface="+mn-ea"/>
+                  <a:cs typeface="+mn-cs"/>
+                </a:defRPr>
+              </a:lvl2pPr>
+              <a:lvl3pPr marL="822960" indent="-228600" algn="just" rtl="0" eaLnBrk="1" latinLnBrk="0" hangingPunct="1">
+                <a:spcBef>
+                  <a:spcPts val="500"/>
+                </a:spcBef>
+                <a:buClr>
+                  <a:schemeClr val="bg1">
+                    <a:shade val="50000"/>
+                  </a:schemeClr>
+                </a:buClr>
+                <a:buSzPct val="76000"/>
+                <a:buFont typeface="Wingdings 3"/>
+                <a:buChar char=""/>
+                <a:defRPr kumimoji="0" sz="2000" kern="1200">
+                  <a:solidFill>
+                    <a:schemeClr val="tx1"/>
+                  </a:solidFill>
+                  <a:latin typeface="+mn-lt"/>
+                  <a:ea typeface="+mn-ea"/>
+                  <a:cs typeface="+mn-cs"/>
+                </a:defRPr>
+              </a:lvl3pPr>
+              <a:lvl4pPr marL="1097280" indent="-228600" algn="just" rtl="0" eaLnBrk="1" latinLnBrk="0" hangingPunct="1">
+                <a:spcBef>
+                  <a:spcPts val="400"/>
+                </a:spcBef>
+                <a:buClr>
+                  <a:schemeClr val="accent2">
+                    <a:shade val="75000"/>
+                  </a:schemeClr>
+                </a:buClr>
+                <a:buSzPct val="70000"/>
+                <a:buFont typeface="Wingdings"/>
+                <a:buChar char=""/>
+                <a:defRPr kumimoji="0" sz="1800" kern="1200">
+                  <a:solidFill>
+                    <a:schemeClr val="tx1"/>
+                  </a:solidFill>
+                  <a:latin typeface="+mn-lt"/>
+                  <a:ea typeface="+mn-ea"/>
+                  <a:cs typeface="+mn-cs"/>
+                </a:defRPr>
+              </a:lvl4pPr>
+              <a:lvl5pPr marL="1371600" indent="-228600" algn="just" rtl="0" eaLnBrk="1" latinLnBrk="0" hangingPunct="1">
+                <a:spcBef>
+                  <a:spcPts val="300"/>
+                </a:spcBef>
+                <a:buClr>
+                  <a:schemeClr val="accent2"/>
+                </a:buClr>
+                <a:buSzPct val="70000"/>
+                <a:buFont typeface="Wingdings"/>
+                <a:buChar char=""/>
+                <a:defRPr kumimoji="0" sz="1600" kern="1200">
+                  <a:solidFill>
+                    <a:schemeClr val="tx1"/>
+                  </a:solidFill>
+                  <a:latin typeface="+mn-lt"/>
+                  <a:ea typeface="+mn-ea"/>
+                  <a:cs typeface="+mn-cs"/>
+                </a:defRPr>
+              </a:lvl5pPr>
+              <a:lvl6pPr marL="1645920" indent="-182880" algn="l" rtl="0" eaLnBrk="1" latinLnBrk="0" hangingPunct="1">
+                <a:spcBef>
+                  <a:spcPts val="300"/>
+                </a:spcBef>
+                <a:buClr>
+                  <a:srgbClr val="9FB8CD">
+                    <a:shade val="75000"/>
+                  </a:srgbClr>
+                </a:buClr>
+                <a:buSzPct val="75000"/>
+                <a:buFont typeface="Wingdings 3"/>
+                <a:buChar char=""/>
+                <a:defRPr kumimoji="0" lang="en-US" sz="1600" kern="1200" smtClean="0">
+                  <a:solidFill>
+                    <a:schemeClr val="tx1"/>
+                  </a:solidFill>
+                  <a:latin typeface="+mn-lt"/>
+                  <a:ea typeface="+mn-ea"/>
+                  <a:cs typeface="+mn-cs"/>
+                </a:defRPr>
+              </a:lvl6pPr>
+              <a:lvl7pPr marL="1828800" indent="-182880" algn="l" rtl="0" eaLnBrk="1" latinLnBrk="0" hangingPunct="1">
+                <a:spcBef>
+                  <a:spcPts val="300"/>
+                </a:spcBef>
+                <a:buClr>
+                  <a:srgbClr val="727CA3">
+                    <a:shade val="75000"/>
+                  </a:srgbClr>
+                </a:buClr>
+                <a:buSzPct val="75000"/>
+                <a:buFont typeface="Wingdings 3"/>
+                <a:buChar char=""/>
+                <a:defRPr kumimoji="0" lang="en-US" sz="1400" kern="1200" smtClean="0">
+                  <a:solidFill>
+                    <a:schemeClr val="tx1"/>
+                  </a:solidFill>
+                  <a:latin typeface="+mn-lt"/>
+                  <a:ea typeface="+mn-ea"/>
+                  <a:cs typeface="+mn-cs"/>
+                </a:defRPr>
+              </a:lvl7pPr>
+              <a:lvl8pPr marL="2011680" indent="-182880" algn="l" rtl="0" eaLnBrk="1" latinLnBrk="0" hangingPunct="1">
+                <a:spcBef>
+                  <a:spcPts val="300"/>
+                </a:spcBef>
+                <a:buClr>
+                  <a:prstClr val="white">
+                    <a:shade val="50000"/>
+                  </a:prstClr>
+                </a:buClr>
+                <a:buSzPct val="75000"/>
+                <a:buFont typeface="Wingdings 3"/>
+                <a:buChar char=""/>
+                <a:defRPr kumimoji="0" lang="en-US" sz="1400" kern="1200" smtClean="0">
+                  <a:solidFill>
+                    <a:schemeClr val="tx1"/>
+                  </a:solidFill>
+                  <a:latin typeface="+mn-lt"/>
+                  <a:ea typeface="+mn-ea"/>
+                  <a:cs typeface="+mn-cs"/>
+                </a:defRPr>
+              </a:lvl8pPr>
+              <a:lvl9pPr marL="2194560" indent="-182880" algn="l" rtl="0" eaLnBrk="1" latinLnBrk="0" hangingPunct="1">
+                <a:spcBef>
+                  <a:spcPts val="300"/>
+                </a:spcBef>
+                <a:buClr>
+                  <a:srgbClr val="9FB8CD"/>
+                </a:buClr>
+                <a:buSzPct val="75000"/>
+                <a:buFont typeface="Wingdings 3"/>
+                <a:buChar char=""/>
+                <a:defRPr kumimoji="0" lang="en-US" sz="1200" kern="1200" smtClean="0">
+                  <a:solidFill>
+                    <a:schemeClr val="tx1"/>
+                  </a:solidFill>
+                  <a:latin typeface="+mn-lt"/>
+                  <a:ea typeface="+mn-ea"/>
+                  <a:cs typeface="+mn-cs"/>
+                </a:defRPr>
+              </a:lvl9pPr>
+            </a:lstStyle>
+            <a:p>
+              <a:pPr marL="0" indent="0" algn="ctr" fontAlgn="auto">
+                <a:spcAft>
+                  <a:spcPts val="0"/>
+                </a:spcAft>
+                <a:buNone/>
+              </a:pPr>
+              <a:endParaRPr lang="en-US" dirty="0"/>
+            </a:p>
+            <a:p>
+              <a:pPr marL="0" indent="0" algn="l" fontAlgn="auto">
+                <a:spcAft>
+                  <a:spcPts val="0"/>
+                </a:spcAft>
+                <a:buNone/>
+              </a:pPr>
+              <a:r>
+                <a:rPr lang="en-US" i="1" dirty="0"/>
+                <a:t>  0      1     2     3      4      5      6      7</a:t>
+              </a:r>
+            </a:p>
+          </p:txBody>
+        </p:sp>
+      </p:grpSp>
       <p:sp>
         <p:nvSpPr>
           <p:cNvPr id="15" name="Rectangle 3">
@@ -15489,7 +15510,7 @@
           </p:cNvSpPr>
           <p:nvPr>
             <p:custDataLst>
-              <p:tags r:id="rId4"/>
+              <p:tags r:id="rId3"/>
             </p:custDataLst>
           </p:nvPr>
         </p:nvSpPr>
@@ -15726,7 +15747,7 @@
           </p:cNvSpPr>
           <p:nvPr>
             <p:custDataLst>
-              <p:tags r:id="rId5"/>
+              <p:tags r:id="rId4"/>
             </p:custDataLst>
           </p:nvPr>
         </p:nvSpPr>
@@ -15943,7 +15964,7 @@
           </p:cNvSpPr>
           <p:nvPr>
             <p:custDataLst>
-              <p:tags r:id="rId6"/>
+              <p:tags r:id="rId5"/>
             </p:custDataLst>
           </p:nvPr>
         </p:nvSpPr>
